--- a/docs/FitPro_Presentation.pptx
+++ b/docs/FitPro_Presentation.pptx
@@ -4,6 +4,9 @@
   <p:sldMasterIdLst>
     <p:sldMasterId id="2147483648" r:id="rId1"/>
   </p:sldMasterIdLst>
+  <p:notesMasterIdLst>
+    <p:notesMasterId r:id="rId17"/>
+  </p:notesMasterIdLst>
   <p:sldIdLst>
     <p:sldId id="256" r:id="rId2"/>
     <p:sldId id="257" r:id="rId3"/>
@@ -21,9 +24,6 @@
     <p:sldId id="269" r:id="rId15"/>
     <p:sldId id="270" r:id="rId16"/>
   </p:sldIdLst>
-  <p:notesMasterIdLst>
-    <p:notesMasterId r:id="rId17"/>
-  </p:notesMasterIdLst>
   <p:sldSz cx="12192000" cy="6858000"/>
   <p:notesSz cx="6858000" cy="12192000"/>
   <p:defaultTextStyle>
@@ -121,14 +121,14 @@
   <p:extLst>
     <p:ext uri="{521415D9-36F7-43E2-AB2F-B90AF26B5E84}">
       <p14:sectionLst xmlns:p14="http://schemas.microsoft.com/office/powerpoint/2010/main">
-        <p14:section name="Overview" id="{ca72e9c1-1d60-864c-74e1-adba353ca26f}">
+        <p14:section name="Overview" id="{CA72E9C1-1D60-864C-74E1-ADBA353CA26F}">
           <p14:sldIdLst>
             <p14:sldId id="256"/>
             <p14:sldId id="257"/>
             <p14:sldId id="258"/>
           </p14:sldIdLst>
         </p14:section>
-        <p14:section name="Design" id="{644e8959-92dd-cec8-d217-aaac8bc083a9}">
+        <p14:section name="Design" id="{644E8959-92DD-CEC8-D217-AAAC8BC083A9}">
           <p14:sldIdLst>
             <p14:sldId id="259"/>
             <p14:sldId id="260"/>
@@ -136,7 +136,7 @@
             <p14:sldId id="262"/>
           </p14:sldIdLst>
         </p14:section>
-        <p14:section name="Implementation" id="{3f8b2162-a3b9-b60e-dfca-09704d54eda0}">
+        <p14:section name="Implementation" id="{3F8B2162-A3B9-B60E-DFCA-09704D54EDA0}">
           <p14:sldIdLst>
             <p14:sldId id="263"/>
             <p14:sldId id="264"/>
@@ -145,7 +145,7 @@
             <p14:sldId id="267"/>
           </p14:sldIdLst>
         </p14:section>
-        <p14:section name="Wrap-up" id="{5c24eb3a-7e08-423b-9c47-fcd194417377}">
+        <p14:section name="Wrap-up" id="{5C24EB3A-7E08-423B-9C47-FCD194417377}">
           <p14:sldIdLst>
             <p14:sldId id="268"/>
             <p14:sldId id="269"/>
@@ -183,234 +183,10 @@
           <a:chExt cx="0" cy="0"/>
         </a:xfrm>
       </p:grpSpPr>
-      <p:sp>
-        <p:nvSpPr>
-          <p:cNvPr id="2" name="Header Placeholder 1"/>
-          <p:cNvSpPr>
-            <a:spLocks noGrp="1"/>
-          </p:cNvSpPr>
-          <p:nvPr>
-            <p:ph type="hdr" sz="quarter"/>
-          </p:nvPr>
-        </p:nvSpPr>
-        <p:spPr>
-          <a:xfrm>
-            <a:off x="0" y="0"/>
-            <a:ext cx="2971800" cy="458788"/>
-          </a:xfrm>
-          <a:prstGeom prst="rect">
-            <a:avLst/>
-          </a:prstGeom>
-        </p:spPr>
-        <p:txBody>
-          <a:bodyPr vert="horz" lIns="91440" tIns="45720" rIns="91440" bIns="45720" rtlCol="0"/>
-          <a:lstStyle>
-            <a:lvl1pPr algn="l">
-              <a:defRPr sz="1200"/>
-            </a:lvl1pPr>
-          </a:lstStyle>
-          <a:p>
-            <a:endParaRPr lang="en-US"/>
-          </a:p>
-        </p:txBody>
-      </p:sp>
-      <p:sp>
-        <p:nvSpPr>
-          <p:cNvPr id="3" name="Date Placeholder 2"/>
-          <p:cNvSpPr>
-            <a:spLocks noGrp="1"/>
-          </p:cNvSpPr>
-          <p:nvPr>
-            <p:ph type="dt" idx="1"/>
-          </p:nvPr>
-        </p:nvSpPr>
-        <p:spPr>
-          <a:xfrm>
-            <a:off x="3884613" y="0"/>
-            <a:ext cx="2971800" cy="458788"/>
-          </a:xfrm>
-          <a:prstGeom prst="rect">
-            <a:avLst/>
-          </a:prstGeom>
-        </p:spPr>
-        <p:txBody>
-          <a:bodyPr vert="horz" lIns="91440" tIns="45720" rIns="91440" bIns="45720" rtlCol="0"/>
-          <a:lstStyle>
-            <a:lvl1pPr algn="r">
-              <a:defRPr sz="1200"/>
-            </a:lvl1pPr>
-          </a:lstStyle>
-          <a:p>
-            <a:fld id="{5282F153-3F37-0F45-9E97-73ACFA13230C}" type="datetimeFigureOut">
-              <a:rPr lang="en-US"/>
-              <a:t>7/23/19</a:t>
-            </a:fld>
-            <a:endParaRPr lang="en-US"/>
-          </a:p>
-        </p:txBody>
-      </p:sp>
-      <p:sp>
-        <p:nvSpPr>
-          <p:cNvPr id="4" name="Slide Image Placeholder 3"/>
-          <p:cNvSpPr>
-            <a:spLocks noGrp="1" noRot="1" noChangeAspect="1"/>
-          </p:cNvSpPr>
-          <p:nvPr>
-            <p:ph type="sldImg" idx="2"/>
-          </p:nvPr>
-        </p:nvSpPr>
-        <p:spPr>
-          <a:xfrm>
-            <a:off x="685800" y="1143000"/>
-            <a:ext cx="5486400" cy="3086100"/>
-          </a:xfrm>
-          <a:prstGeom prst="rect">
-            <a:avLst/>
-          </a:prstGeom>
-          <a:noFill/>
-          <a:ln w="12700">
-            <a:solidFill>
-              <a:prstClr val="black"/>
-            </a:solidFill>
-          </a:ln>
-        </p:spPr>
-        <p:txBody>
-          <a:bodyPr vert="horz" lIns="91440" tIns="45720" rIns="91440" bIns="45720" rtlCol="0" anchor="ctr"/>
-          <a:lstStyle/>
-          <a:p>
-            <a:endParaRPr lang="en-US"/>
-          </a:p>
-        </p:txBody>
-      </p:sp>
-      <p:sp>
-        <p:nvSpPr>
-          <p:cNvPr id="5" name="Notes Placeholder 4"/>
-          <p:cNvSpPr>
-            <a:spLocks noGrp="1"/>
-          </p:cNvSpPr>
-          <p:nvPr>
-            <p:ph type="body" sz="quarter" idx="3"/>
-          </p:nvPr>
-        </p:nvSpPr>
-        <p:spPr>
-          <a:xfrm>
-            <a:off x="685800" y="4400550"/>
-            <a:ext cx="5486400" cy="3600450"/>
-          </a:xfrm>
-          <a:prstGeom prst="rect">
-            <a:avLst/>
-          </a:prstGeom>
-        </p:spPr>
-        <p:txBody>
-          <a:bodyPr vert="horz" lIns="91440" tIns="45720" rIns="91440" bIns="45720" rtlCol="0"/>
-          <a:lstStyle/>
-          <a:p>
-            <a:pPr lvl="0"/>
-            <a:r>
-              <a:rPr lang="en-US"/>
-              <a:t>Click to edit Master text styles</a:t>
-            </a:r>
-          </a:p>
-          <a:p>
-            <a:pPr lvl="1"/>
-            <a:r>
-              <a:rPr lang="en-US"/>
-              <a:t>Second level</a:t>
-            </a:r>
-          </a:p>
-          <a:p>
-            <a:pPr lvl="2"/>
-            <a:r>
-              <a:rPr lang="en-US"/>
-              <a:t>Third level</a:t>
-            </a:r>
-          </a:p>
-          <a:p>
-            <a:pPr lvl="3"/>
-            <a:r>
-              <a:rPr lang="en-US"/>
-              <a:t>Fourth level</a:t>
-            </a:r>
-          </a:p>
-          <a:p>
-            <a:pPr lvl="4"/>
-            <a:r>
-              <a:rPr lang="en-US"/>
-              <a:t>Fifth level</a:t>
-            </a:r>
-          </a:p>
-        </p:txBody>
-      </p:sp>
-      <p:sp>
-        <p:nvSpPr>
-          <p:cNvPr id="6" name="Footer Placeholder 5"/>
-          <p:cNvSpPr>
-            <a:spLocks noGrp="1"/>
-          </p:cNvSpPr>
-          <p:nvPr>
-            <p:ph type="ftr" sz="quarter" idx="4"/>
-          </p:nvPr>
-        </p:nvSpPr>
-        <p:spPr>
-          <a:xfrm>
-            <a:off x="0" y="8685213"/>
-            <a:ext cx="2971800" cy="458787"/>
-          </a:xfrm>
-          <a:prstGeom prst="rect">
-            <a:avLst/>
-          </a:prstGeom>
-        </p:spPr>
-        <p:txBody>
-          <a:bodyPr vert="horz" lIns="91440" tIns="45720" rIns="91440" bIns="45720" rtlCol="0" anchor="b"/>
-          <a:lstStyle>
-            <a:lvl1pPr algn="l">
-              <a:defRPr sz="1200"/>
-            </a:lvl1pPr>
-          </a:lstStyle>
-          <a:p>
-            <a:endParaRPr lang="en-US"/>
-          </a:p>
-        </p:txBody>
-      </p:sp>
-      <p:sp>
-        <p:nvSpPr>
-          <p:cNvPr id="7" name="Slide Number Placeholder 6"/>
-          <p:cNvSpPr>
-            <a:spLocks noGrp="1"/>
-          </p:cNvSpPr>
-          <p:nvPr>
-            <p:ph type="sldNum" sz="quarter" idx="5"/>
-          </p:nvPr>
-        </p:nvSpPr>
-        <p:spPr>
-          <a:xfrm>
-            <a:off x="3884613" y="8685213"/>
-            <a:ext cx="2971800" cy="458787"/>
-          </a:xfrm>
-          <a:prstGeom prst="rect">
-            <a:avLst/>
-          </a:prstGeom>
-        </p:spPr>
-        <p:txBody>
-          <a:bodyPr vert="horz" lIns="91440" tIns="45720" rIns="91440" bIns="45720" rtlCol="0" anchor="b"/>
-          <a:lstStyle>
-            <a:lvl1pPr algn="r">
-              <a:defRPr sz="1200"/>
-            </a:lvl1pPr>
-          </a:lstStyle>
-          <a:p>
-            <a:fld id="{CE5E9CC1-C706-0F49-92D6-E571CC5EEA8F}" type="slidenum">
-              <a:rPr lang="en-US"/>
-              <a:t>‹#›</a:t>
-            </a:fld>
-            <a:endParaRPr lang="en-US"/>
-          </a:p>
-        </p:txBody>
-      </p:sp>
     </p:spTree>
     <p:extLst>
       <p:ext uri="{BB962C8B-B14F-4D97-AF65-F5344CB8AC3E}">
-        <p14:creationId xmlns:p14="http://schemas.microsoft.com/office/powerpoint/2010/main" val="1024086991"/>
+        <p14:creationId xmlns:p14="http://schemas.microsoft.com/office/powerpoint/2010/main" val="2019936339"/>
       </p:ext>
     </p:extLst>
   </p:cSld>
@@ -558,7 +334,6 @@
               <a:rPr lang="en-US" dirty="0"/>
               <a:t>Introduce the project: FitPro is a full-stack Java web application where trainers publish workout programs and members enrol, log sessions and track calories. It is built with Servlets, JSP, JDBC and MySQL.</a:t>
             </a:r>
-            <a:endParaRPr lang="en-US" dirty="0"/>
           </a:p>
         </p:txBody>
       </p:sp>
@@ -646,7 +421,6 @@
               <a:rPr lang="en-US" dirty="0"/>
               <a:t>Sending a welcome or enrolment notification is slow in real life, so it runs on a two-thread pool and the web request returns immediately. Several pool threads update one shared counter, so the increment is synchronized to avoid race conditions.</a:t>
             </a:r>
-            <a:endParaRPr lang="en-US" dirty="0"/>
           </a:p>
         </p:txBody>
       </p:sp>
@@ -734,7 +508,6 @@
               <a:rPr lang="en-US" dirty="0"/>
               <a:t>DBConnection loads the driver once and reads db.properties, with environment variables overriding it. All SQL uses PreparedStatement. On the web side, six servlets cover the whole application and AuthFilter protects every URL under /app.</a:t>
             </a:r>
-            <a:endParaRPr lang="en-US" dirty="0"/>
           </a:p>
         </p:txBody>
       </p:sp>
@@ -822,7 +595,6 @@
               <a:rPr lang="en-US" dirty="0"/>
               <a:t>Security is built in at several levels: salted PBKDF2 password hashing, prepared statements against SQL injection, escaped output against XSS, and session handling plus server-side role checks. CSRF tokens are listed as future work.</a:t>
             </a:r>
-            <a:endParaRPr lang="en-US" dirty="0"/>
           </a:p>
         </p:txBody>
       </p:sp>
@@ -910,7 +682,6 @@
               <a:rPr lang="en-US" dirty="0"/>
               <a:t>This maps the Java Web Based Projects rubric to what was built. The GUI rubric topics, collections and generics, multithreading and synchronization, and database classes, are covered as well.</a:t>
             </a:r>
-            <a:endParaRPr lang="en-US" dirty="0"/>
           </a:p>
         </p:txBody>
       </p:sp>
@@ -998,7 +769,6 @@
               <a:rPr lang="en-US" dirty="0"/>
               <a:t>Walk through the demo in this order: it shows both roles and every layer. Then mention the planned improvements: CSRF tokens, admin approval for trainers, video lessons, chat and a REST API.</a:t>
             </a:r>
-            <a:endParaRPr lang="en-US" dirty="0"/>
           </a:p>
         </p:txBody>
       </p:sp>
@@ -1086,7 +856,6 @@
               <a:rPr lang="en-US" dirty="0"/>
               <a:t>Close by thanking the audience and inviting questions. Share the GitHub link so they can clone and run the project.</a:t>
             </a:r>
-            <a:endParaRPr lang="en-US" dirty="0"/>
           </a:p>
         </p:txBody>
       </p:sp>
@@ -1174,7 +943,6 @@
               <a:rPr lang="en-US" dirty="0"/>
               <a:t>Explain the gap: people want structured training and progress tracking without expensive gym memberships, and independent trainers lack a simple place to publish programs. FitPro solves both with one platform.</a:t>
             </a:r>
-            <a:endParaRPr lang="en-US" dirty="0"/>
           </a:p>
         </p:txBody>
       </p:sp>
@@ -1262,7 +1030,6 @@
               <a:rPr lang="en-US" dirty="0"/>
               <a:t>Two roles share one login system. Members train and track; trainers publish programs. Role checks are enforced on the server, not only hidden in the interface.</a:t>
             </a:r>
-            <a:endParaRPr lang="en-US" dirty="0"/>
           </a:p>
         </p:txBody>
       </p:sp>
@@ -1350,7 +1117,6 @@
               <a:rPr lang="en-US" dirty="0"/>
               <a:t>Each layer uses a standard, industry-relevant technology. JSP with JSTL for the views, Java 11 servlets for control, MySQL accessed through plain JDBC, Maven for the build and Tomcat 9 as the server.</a:t>
             </a:r>
-            <a:endParaRPr lang="en-US" dirty="0"/>
           </a:p>
         </p:txBody>
       </p:sp>
@@ -1438,7 +1204,6 @@
               <a:rPr lang="en-US" dirty="0"/>
               <a:t>A request flows left to right: the browser calls a servlet (controller), which delegates to a service (business rules), which uses a DAO (JDBC) to talk to MySQL. JSP pages render the response. Keeping layers separate makes the code modular and easy to test.</a:t>
             </a:r>
-            <a:endParaRPr lang="en-US" dirty="0"/>
           </a:p>
         </p:txBody>
       </p:sp>
@@ -1526,7 +1291,6 @@
               <a:rPr lang="en-US" dirty="0"/>
               <a:t>The repository is organised by responsibility. Model holds entities, dao holds JDBC code, service holds logic, servlet holds controllers. This clean structure is what the README documents for anyone cloning the project from GitHub.</a:t>
             </a:r>
-            <a:endParaRPr lang="en-US" dirty="0"/>
           </a:p>
         </p:txBody>
       </p:sp>
@@ -1614,7 +1378,6 @@
               <a:rPr lang="en-US" dirty="0"/>
               <a:t>Four tables. users stores both roles. workouts are optionally owned by a trainer. enrollments is a join table between members and workouts with a unique constraint. progress_logs stores each session with the calories calculated by the workout object.</a:t>
             </a:r>
-            <a:endParaRPr lang="en-US" dirty="0"/>
           </a:p>
         </p:txBody>
       </p:sp>
@@ -1702,7 +1465,6 @@
               <a:rPr lang="en-US" dirty="0"/>
               <a:t>User is abstract with two subclasses that override getRole and getWelcomeMessage. Workout is abstract and implements the CalorieCalculable interface. Each workout type has its own formula, so the same method call gives different results. The numbers shown come from running the actual code.</a:t>
             </a:r>
-            <a:endParaRPr lang="en-US" dirty="0"/>
           </a:p>
         </p:txBody>
       </p:sp>
@@ -1790,7 +1552,6 @@
               <a:rPr lang="en-US" dirty="0"/>
               <a:t>BaseDAO is a generic interface reused by every DAO. Sets give constant-time enrolment checks, TreeMap with streams groups calories by workout. A single checked AppException wraps low-level SQL errors so the user only ever sees a friendly message.</a:t>
             </a:r>
-            <a:endParaRPr lang="en-US" dirty="0"/>
           </a:p>
         </p:txBody>
       </p:sp>
@@ -1868,6 +1629,7 @@
         <a:solidFill>
           <a:srgbClr val="14213D"/>
         </a:solidFill>
+        <a:effectLst/>
       </p:bgPr>
     </p:bg>
     <p:spTree>
@@ -1887,9 +1649,11 @@
       <p:sp>
         <p:nvSpPr>
           <p:cNvPr id="2" name="Text 0"/>
-          <p:cNvSpPr/>
+          <p:cNvSpPr>
+            <a:spLocks noGrp="1"/>
+          </p:cNvSpPr>
           <p:nvPr>
-            <p:ph idx="100" type="title" hasCustomPrompt="1"/>
+            <p:ph type="title" idx="100" hasCustomPrompt="1"/>
           </p:nvPr>
         </p:nvSpPr>
         <p:spPr>
@@ -1906,7 +1670,7 @@
         <p:txBody>
           <a:bodyPr wrap="square" rtlCol="0"/>
           <a:lstStyle>
-            <a:lvl1pPr algn="l" indent="0" marL="0">
+            <a:lvl1pPr marL="0" indent="0" algn="l">
               <a:buNone/>
               <a:defRPr lang="en-US" sz="6000" b="1" dirty="0">
                 <a:solidFill>
@@ -1916,7 +1680,7 @@
             </a:lvl1pPr>
           </a:lstStyle>
           <a:p>
-            <a:pPr algn="l" indent="0" marL="0">
+            <a:pPr marL="0" indent="0" algn="l">
               <a:buNone/>
             </a:pPr>
             <a:endParaRPr lang="en-US" sz="6000" dirty="0"/>
@@ -1939,6 +1703,7 @@
         <a:solidFill>
           <a:srgbClr val="FFFFFF"/>
         </a:solidFill>
+        <a:effectLst/>
       </p:bgPr>
     </p:bg>
     <p:spTree>
@@ -1958,9 +1723,11 @@
       <p:sp>
         <p:nvSpPr>
           <p:cNvPr id="2" name="Text 0"/>
-          <p:cNvSpPr/>
+          <p:cNvSpPr>
+            <a:spLocks noGrp="1"/>
+          </p:cNvSpPr>
           <p:nvPr>
-            <p:ph idx="100" type="title" hasCustomPrompt="1"/>
+            <p:ph type="title" idx="100" hasCustomPrompt="1"/>
           </p:nvPr>
         </p:nvSpPr>
         <p:spPr>
@@ -1977,7 +1744,7 @@
         <p:txBody>
           <a:bodyPr wrap="square" rtlCol="0"/>
           <a:lstStyle>
-            <a:lvl1pPr algn="l" indent="0" marL="0">
+            <a:lvl1pPr marL="0" indent="0" algn="l">
               <a:buNone/>
               <a:defRPr lang="en-US" sz="3400" b="1" dirty="0">
                 <a:solidFill>
@@ -1987,7 +1754,7 @@
             </a:lvl1pPr>
           </a:lstStyle>
           <a:p>
-            <a:pPr algn="l" indent="0" marL="0">
+            <a:pPr marL="0" indent="0" algn="l">
               <a:buNone/>
             </a:pPr>
             <a:endParaRPr lang="en-US" sz="3400" dirty="0"/>
@@ -2015,7 +1782,7 @@
           <a:bodyPr wrap="square" lIns="0" tIns="0" rIns="0" bIns="0" rtlCol="0" anchor="ctr"/>
           <a:lstStyle/>
           <a:p>
-            <a:pPr indent="0" marL="0">
+            <a:pPr marL="0" indent="0">
               <a:buNone/>
             </a:pPr>
             <a:r>
@@ -2050,7 +1817,7 @@
           </a:prstGeom>
           <a:extLst>
             <a:ext uri="{C572A759-6A51-4108-AA02-DFA0A04FC94B}">
-              <ma14:wrappingTextBoxFlag xmlns:ma14="http://schemas.microsoft.com/office/mac/drawingml/2011/main" val="0"/>
+              <ma14:wrappingTextBoxFlag xmlns:ma14="http://schemas.microsoft.com/office/mac/drawingml/2011/main" xmlns="" val="0"/>
             </a:ext>
           </a:extLst>
         </p:spPr>
@@ -2068,8 +1835,8 @@
           <a:p>
             <a:pPr algn="l"/>
             <a:fld id="{F7021451-1387-4CA6-816F-3879F97B5CBC}" type="slidenum">
-              <a:rPr b="0" lang="en-US"/>
-              <a:t>1003</a:t>
+              <a:rPr lang="en-US" b="0"/>
+              <a:t>‹#›</a:t>
             </a:fld>
             <a:endParaRPr lang="en-US"/>
           </a:p>
@@ -2091,6 +1858,7 @@
         <a:solidFill>
           <a:srgbClr val="14213D"/>
         </a:solidFill>
+        <a:effectLst/>
       </p:bgPr>
     </p:bg>
     <p:spTree>
@@ -2110,9 +1878,11 @@
       <p:sp>
         <p:nvSpPr>
           <p:cNvPr id="2" name="Text 0"/>
-          <p:cNvSpPr/>
+          <p:cNvSpPr>
+            <a:spLocks noGrp="1"/>
+          </p:cNvSpPr>
           <p:nvPr>
-            <p:ph idx="100" type="title" hasCustomPrompt="1"/>
+            <p:ph type="title" idx="100" hasCustomPrompt="1"/>
           </p:nvPr>
         </p:nvSpPr>
         <p:spPr>
@@ -2129,7 +1899,7 @@
         <p:txBody>
           <a:bodyPr wrap="square" rtlCol="0"/>
           <a:lstStyle>
-            <a:lvl1pPr algn="l" indent="0" marL="0">
+            <a:lvl1pPr marL="0" indent="0" algn="l">
               <a:buNone/>
               <a:defRPr lang="en-US" sz="3400" b="1" dirty="0">
                 <a:solidFill>
@@ -2139,7 +1909,7 @@
             </a:lvl1pPr>
           </a:lstStyle>
           <a:p>
-            <a:pPr algn="l" indent="0" marL="0">
+            <a:pPr marL="0" indent="0" algn="l">
               <a:buNone/>
             </a:pPr>
             <a:endParaRPr lang="en-US" sz="3400" dirty="0"/>
@@ -2167,7 +1937,7 @@
           <a:bodyPr wrap="square" lIns="0" tIns="0" rIns="0" bIns="0" rtlCol="0" anchor="ctr"/>
           <a:lstStyle/>
           <a:p>
-            <a:pPr indent="0" marL="0">
+            <a:pPr marL="0" indent="0">
               <a:buNone/>
             </a:pPr>
             <a:r>
@@ -2202,7 +1972,7 @@
           </a:prstGeom>
           <a:extLst>
             <a:ext uri="{C572A759-6A51-4108-AA02-DFA0A04FC94B}">
-              <ma14:wrappingTextBoxFlag xmlns:ma14="http://schemas.microsoft.com/office/mac/drawingml/2011/main" val="0"/>
+              <ma14:wrappingTextBoxFlag xmlns:ma14="http://schemas.microsoft.com/office/mac/drawingml/2011/main" xmlns="" val="0"/>
             </a:ext>
           </a:extLst>
         </p:spPr>
@@ -2220,8 +1990,8 @@
           <a:p>
             <a:pPr algn="l"/>
             <a:fld id="{F7021451-1387-4CA6-816F-3879F97B5CBC}" type="slidenum">
-              <a:rPr b="0" lang="en-US"/>
-              <a:t>1004</a:t>
+              <a:rPr lang="en-US" b="0"/>
+              <a:t>‹#›</a:t>
             </a:fld>
             <a:endParaRPr lang="en-US"/>
           </a:p>
@@ -2238,6 +2008,11 @@
 <file path=ppt/slideMasters/slideMaster1.xml><?xml version="1.0" encoding="utf-8"?>
 <p:sldMaster xmlns:a="http://schemas.openxmlformats.org/drawingml/2006/main" xmlns:r="http://schemas.openxmlformats.org/officeDocument/2006/relationships" xmlns:p="http://schemas.openxmlformats.org/presentationml/2006/main">
   <p:cSld>
+    <p:bg>
+      <p:bgRef idx="1001">
+        <a:schemeClr val="bg1"/>
+      </p:bgRef>
+    </p:bg>
     <p:spTree>
       <p:nvGrpSpPr>
         <p:cNvPr id="1" name=""/>
@@ -2272,7 +2047,7 @@
           </a:prstGeom>
           <a:extLst>
             <a:ext uri="{C572A759-6A51-4108-AA02-DFA0A04FC94B}">
-              <ma14:wrappingTextBoxFlag xmlns:ma14="http://schemas.microsoft.com/office/mac/drawingml/2011/main" val="0"/>
+              <ma14:wrappingTextBoxFlag xmlns:ma14="http://schemas.microsoft.com/office/mac/drawingml/2011/main" xmlns="" val="0"/>
             </a:ext>
           </a:extLst>
         </p:spPr>
@@ -2290,8 +2065,8 @@
           <a:p>
             <a:pPr algn="l"/>
             <a:fld id="{F7021451-1387-4CA6-816F-3879F97B5CBC}" type="slidenum">
-              <a:rPr b="0" lang="en-US"/>
-              <a:t>null</a:t>
+              <a:rPr lang="en-US" b="0"/>
+              <a:t>‹#›</a:t>
             </a:fld>
             <a:endParaRPr lang="en-US"/>
           </a:p>
@@ -2580,9 +2355,11 @@
       <p:sp>
         <p:nvSpPr>
           <p:cNvPr id="2" name="Text 0"/>
-          <p:cNvSpPr/>
+          <p:cNvSpPr>
+            <a:spLocks noGrp="1"/>
+          </p:cNvSpPr>
           <p:nvPr>
-            <p:ph idx="100" type="title" hasCustomPrompt="1"/>
+            <p:ph type="title" idx="100" hasCustomPrompt="1"/>
           </p:nvPr>
         </p:nvSpPr>
         <p:spPr>
@@ -2600,7 +2377,7 @@
           <a:bodyPr wrap="square" lIns="0" tIns="0" rIns="0" bIns="0" rtlCol="0" anchor="b"/>
           <a:lstStyle/>
           <a:p>
-            <a:pPr algn="l" indent="0" marL="0">
+            <a:pPr marL="0" indent="0" algn="l">
               <a:buNone/>
             </a:pPr>
             <a:r>
@@ -2636,7 +2413,7 @@
           <a:bodyPr wrap="square" lIns="0" tIns="0" rIns="0" bIns="0" rtlCol="0" anchor="t"/>
           <a:lstStyle/>
           <a:p>
-            <a:pPr indent="0" marL="0">
+            <a:pPr marL="0" indent="0">
               <a:buNone/>
             </a:pPr>
             <a:r>
@@ -2672,7 +2449,7 @@
           <a:bodyPr wrap="square" lIns="0" tIns="0" rIns="0" bIns="0" rtlCol="0" anchor="t"/>
           <a:lstStyle/>
           <a:p>
-            <a:pPr indent="0" marL="0">
+            <a:pPr marL="0" indent="0">
               <a:buNone/>
             </a:pPr>
             <a:r>
@@ -2684,42 +2461,6 @@
               <a:t>Java Servlets  |  JSP  |  JDBC  |  MySQL</a:t>
             </a:r>
             <a:endParaRPr lang="en-US" sz="1800" dirty="0"/>
-          </a:p>
-        </p:txBody>
-      </p:sp>
-      <p:sp>
-        <p:nvSpPr>
-          <p:cNvPr id="5" name="Text 3"/>
-          <p:cNvSpPr txBox="1"/>
-          <p:nvPr/>
-        </p:nvSpPr>
-        <p:spPr>
-          <a:xfrm>
-            <a:off x="731520" y="5760720"/>
-            <a:ext cx="6949440" cy="365760"/>
-          </a:xfrm>
-          <a:prstGeom prst="rect">
-            <a:avLst/>
-          </a:prstGeom>
-          <a:noFill/>
-          <a:ln/>
-        </p:spPr>
-        <p:txBody>
-          <a:bodyPr wrap="square" lIns="0" tIns="0" rIns="0" bIns="0" rtlCol="0" anchor="t"/>
-          <a:lstStyle/>
-          <a:p>
-            <a:pPr indent="0" marL="0">
-              <a:buNone/>
-            </a:pPr>
-            <a:r>
-              <a:rPr lang="en-US" sz="1400" dirty="0">
-                <a:solidFill>
-                  <a:schemeClr val="bg2"/>
-                </a:solidFill>
-              </a:rPr>
-              <a:t>Your Name  |  Roll No.  |  Course / Institute</a:t>
-            </a:r>
-            <a:endParaRPr lang="en-US" sz="1400" dirty="0"/>
           </a:p>
         </p:txBody>
       </p:sp>
@@ -2745,14 +2486,14 @@
       </p:sp>
       <p:pic>
         <p:nvPicPr>
-          <p:cNvPr id="7" name="hero-icon" descr="preencoded.png">    </p:cNvPr>
+          <p:cNvPr id="7" name="hero-icon" descr="preencoded.png"/>
           <p:cNvPicPr>
             <a:picLocks noChangeAspect="1"/>
           </p:cNvPicPr>
           <p:nvPr/>
         </p:nvPicPr>
         <p:blipFill>
-          <a:blip r:embed="rId1"/>
+          <a:blip r:embed="rId3"/>
           <a:stretch>
             <a:fillRect/>
           </a:stretch>
@@ -2767,6 +2508,192 @@
           </a:prstGeom>
         </p:spPr>
       </p:pic>
+      <p:sp>
+        <p:nvSpPr>
+          <p:cNvPr id="8" name="TextBox 7"/>
+          <p:cNvSpPr txBox="1"/>
+          <p:nvPr/>
+        </p:nvSpPr>
+        <p:spPr>
+          <a:xfrm>
+            <a:off x="731520" y="4663440"/>
+            <a:ext cx="4274820" cy="2123658"/>
+          </a:xfrm>
+          <a:prstGeom prst="rect">
+            <a:avLst/>
+          </a:prstGeom>
+          <a:solidFill>
+            <a:schemeClr val="accent1"/>
+          </a:solidFill>
+        </p:spPr>
+        <p:txBody>
+          <a:bodyPr wrap="square" rtlCol="0">
+            <a:spAutoFit/>
+          </a:bodyPr>
+          <a:lstStyle/>
+          <a:p>
+            <a:pPr lvl="3"/>
+            <a:r>
+              <a:rPr lang="en-US" dirty="0" smtClean="0">
+                <a:solidFill>
+                  <a:schemeClr val="bg2">
+                    <a:lumMod val="10000"/>
+                  </a:schemeClr>
+                </a:solidFill>
+                <a:latin typeface="Arial Black" panose="020B0A04020102020204" pitchFamily="34" charset="0"/>
+              </a:rPr>
+              <a:t>Team Info</a:t>
+            </a:r>
+          </a:p>
+          <a:p>
+            <a:r>
+              <a:rPr lang="en-US" dirty="0" smtClean="0"/>
+              <a:t/>
+            </a:r>
+            <a:br>
+              <a:rPr lang="en-US" dirty="0" smtClean="0"/>
+            </a:br>
+            <a:r>
+              <a:rPr lang="en-US" sz="1200" b="1" dirty="0" smtClean="0">
+                <a:solidFill>
+                  <a:srgbClr val="000000"/>
+                </a:solidFill>
+                <a:latin typeface="Arial Rounded MT Bold" panose="020F0704030504030204" pitchFamily="34" charset="0"/>
+              </a:rPr>
+              <a:t>Aditya Singh</a:t>
+            </a:r>
+            <a:br>
+              <a:rPr lang="en-US" sz="1200" b="1" dirty="0" smtClean="0">
+                <a:solidFill>
+                  <a:srgbClr val="000000"/>
+                </a:solidFill>
+                <a:latin typeface="Arial Rounded MT Bold" panose="020F0704030504030204" pitchFamily="34" charset="0"/>
+              </a:rPr>
+            </a:br>
+            <a:r>
+              <a:rPr lang="en-US" sz="1200" b="1" dirty="0" smtClean="0">
+                <a:solidFill>
+                  <a:srgbClr val="000000"/>
+                </a:solidFill>
+                <a:latin typeface="Arial Rounded MT Bold" panose="020F0704030504030204" pitchFamily="34" charset="0"/>
+              </a:rPr>
+              <a:t>25scse1180171</a:t>
+            </a:r>
+          </a:p>
+          <a:p>
+            <a:pPr marL="285750" indent="-285750">
+              <a:buFont typeface="Arial" panose="020B0604020202020204" pitchFamily="34" charset="0"/>
+              <a:buChar char="•"/>
+            </a:pPr>
+            <a:endParaRPr lang="en-US" sz="1200" b="1" dirty="0" smtClean="0">
+              <a:solidFill>
+                <a:srgbClr val="000000"/>
+              </a:solidFill>
+              <a:latin typeface="Arial Rounded MT Bold" panose="020F0704030504030204" pitchFamily="34" charset="0"/>
+            </a:endParaRPr>
+          </a:p>
+          <a:p>
+            <a:r>
+              <a:rPr lang="en-US" sz="1200" b="1" dirty="0" err="1" smtClean="0">
+                <a:solidFill>
+                  <a:srgbClr val="000000"/>
+                </a:solidFill>
+                <a:latin typeface="Arial Rounded MT Bold" panose="020F0704030504030204" pitchFamily="34" charset="0"/>
+              </a:rPr>
+              <a:t>Manik</a:t>
+            </a:r>
+            <a:r>
+              <a:rPr lang="en-US" sz="1200" b="1" dirty="0" smtClean="0">
+                <a:solidFill>
+                  <a:srgbClr val="000000"/>
+                </a:solidFill>
+                <a:latin typeface="Arial Rounded MT Bold" panose="020F0704030504030204" pitchFamily="34" charset="0"/>
+              </a:rPr>
+              <a:t/>
+            </a:r>
+            <a:br>
+              <a:rPr lang="en-US" sz="1200" b="1" dirty="0" smtClean="0">
+                <a:solidFill>
+                  <a:srgbClr val="000000"/>
+                </a:solidFill>
+                <a:latin typeface="Arial Rounded MT Bold" panose="020F0704030504030204" pitchFamily="34" charset="0"/>
+              </a:rPr>
+            </a:br>
+            <a:r>
+              <a:rPr lang="en-US" sz="1200" b="1" dirty="0" smtClean="0">
+                <a:solidFill>
+                  <a:srgbClr val="000000"/>
+                </a:solidFill>
+                <a:latin typeface="Arial Rounded MT Bold" panose="020F0704030504030204" pitchFamily="34" charset="0"/>
+              </a:rPr>
+              <a:t>25scse1180216</a:t>
+            </a:r>
+          </a:p>
+          <a:p>
+            <a:r>
+              <a:rPr lang="en-US" sz="1200" b="1" dirty="0" smtClean="0">
+                <a:solidFill>
+                  <a:srgbClr val="000000"/>
+                </a:solidFill>
+                <a:latin typeface="Arial Rounded MT Bold" panose="020F0704030504030204" pitchFamily="34" charset="0"/>
+              </a:rPr>
+              <a:t/>
+            </a:r>
+            <a:br>
+              <a:rPr lang="en-US" sz="1200" b="1" dirty="0" smtClean="0">
+                <a:solidFill>
+                  <a:srgbClr val="000000"/>
+                </a:solidFill>
+                <a:latin typeface="Arial Rounded MT Bold" panose="020F0704030504030204" pitchFamily="34" charset="0"/>
+              </a:rPr>
+            </a:br>
+            <a:r>
+              <a:rPr lang="en-US" sz="1200" b="1" dirty="0" err="1">
+                <a:solidFill>
+                  <a:srgbClr val="000000"/>
+                </a:solidFill>
+                <a:latin typeface="Arial Rounded MT Bold" panose="020F0704030504030204" pitchFamily="34" charset="0"/>
+              </a:rPr>
+              <a:t>H</a:t>
+            </a:r>
+            <a:r>
+              <a:rPr lang="en-US" sz="1200" b="1" dirty="0" err="1" smtClean="0">
+                <a:solidFill>
+                  <a:srgbClr val="000000"/>
+                </a:solidFill>
+                <a:latin typeface="Arial Rounded MT Bold" panose="020F0704030504030204" pitchFamily="34" charset="0"/>
+              </a:rPr>
+              <a:t>arshit</a:t>
+            </a:r>
+            <a:r>
+              <a:rPr lang="en-US" sz="1200" b="1" dirty="0" smtClean="0">
+                <a:solidFill>
+                  <a:srgbClr val="000000"/>
+                </a:solidFill>
+                <a:latin typeface="Arial Rounded MT Bold" panose="020F0704030504030204" pitchFamily="34" charset="0"/>
+              </a:rPr>
+              <a:t> vats</a:t>
+            </a:r>
+          </a:p>
+          <a:p>
+            <a:r>
+              <a:rPr lang="en-US" sz="1200" b="1" dirty="0" smtClean="0">
+                <a:solidFill>
+                  <a:srgbClr val="000000"/>
+                </a:solidFill>
+                <a:latin typeface="Arial Rounded MT Bold" panose="020F0704030504030204" pitchFamily="34" charset="0"/>
+              </a:rPr>
+              <a:t>25scse1180097</a:t>
+            </a:r>
+            <a:endParaRPr lang="en-US" sz="1200" b="1" dirty="0">
+              <a:solidFill>
+                <a:srgbClr val="000000"/>
+              </a:solidFill>
+              <a:latin typeface="Arial Rounded MT Bold" panose="020F0704030504030204" pitchFamily="34" charset="0"/>
+            </a:endParaRPr>
+          </a:p>
+        </p:txBody>
+      </p:sp>
     </p:spTree>
   </p:cSld>
   <p:clrMapOvr>
@@ -2795,9 +2722,11 @@
       <p:sp>
         <p:nvSpPr>
           <p:cNvPr id="2" name="Text 0"/>
-          <p:cNvSpPr/>
+          <p:cNvSpPr>
+            <a:spLocks noGrp="1"/>
+          </p:cNvSpPr>
           <p:nvPr>
-            <p:ph idx="100" type="title" hasCustomPrompt="1"/>
+            <p:ph type="title" idx="100" hasCustomPrompt="1"/>
           </p:nvPr>
         </p:nvSpPr>
         <p:spPr>
@@ -2815,7 +2744,7 @@
           <a:bodyPr wrap="square" lIns="0" tIns="0" rIns="0" bIns="0" rtlCol="0" anchor="ctr"/>
           <a:lstStyle/>
           <a:p>
-            <a:pPr algn="l" indent="0" marL="0">
+            <a:pPr marL="0" indent="0" algn="l">
               <a:buNone/>
             </a:pPr>
             <a:r>
@@ -2873,7 +2802,7 @@
           <a:bodyPr wrap="square" lIns="0" tIns="0" rIns="0" bIns="0" rtlCol="0" anchor="t"/>
           <a:lstStyle/>
           <a:p>
-            <a:pPr indent="0" marL="0">
+            <a:pPr marL="0" indent="0">
               <a:buNone/>
             </a:pPr>
             <a:r>
@@ -3043,7 +2972,7 @@
           <a:bodyPr wrap="square" lIns="0" tIns="0" rIns="0" bIns="0" rtlCol="0" anchor="ctr"/>
           <a:lstStyle/>
           <a:p>
-            <a:pPr algn="ctr" indent="0" marL="0">
+            <a:pPr marL="0" indent="0" algn="ctr">
               <a:buNone/>
             </a:pPr>
             <a:r>
@@ -3057,7 +2986,7 @@
             <a:endParaRPr lang="en-US" sz="1400" dirty="0"/>
           </a:p>
           <a:p>
-            <a:pPr algn="ctr" indent="0" marL="0">
+            <a:pPr marL="0" indent="0" algn="ctr">
               <a:buNone/>
             </a:pPr>
             <a:r>
@@ -3135,7 +3064,7 @@
           <a:bodyPr wrap="square" lIns="0" tIns="0" rIns="0" bIns="0" rtlCol="0" anchor="ctr"/>
           <a:lstStyle/>
           <a:p>
-            <a:pPr algn="ctr" indent="0" marL="0">
+            <a:pPr marL="0" indent="0" algn="ctr">
               <a:buNone/>
             </a:pPr>
             <a:r>
@@ -3149,7 +3078,7 @@
             <a:endParaRPr lang="en-US" sz="1400" dirty="0"/>
           </a:p>
           <a:p>
-            <a:pPr algn="ctr" indent="0" marL="0">
+            <a:pPr marL="0" indent="0" algn="ctr">
               <a:buNone/>
             </a:pPr>
             <a:r>
@@ -3227,7 +3156,7 @@
           <a:bodyPr wrap="square" lIns="0" tIns="0" rIns="0" bIns="0" rtlCol="0" anchor="ctr"/>
           <a:lstStyle/>
           <a:p>
-            <a:pPr algn="ctr" indent="0" marL="0">
+            <a:pPr marL="0" indent="0" algn="ctr">
               <a:buNone/>
             </a:pPr>
             <a:r>
@@ -3241,7 +3170,7 @@
             <a:endParaRPr lang="en-US" sz="1400" dirty="0"/>
           </a:p>
           <a:p>
-            <a:pPr algn="ctr" indent="0" marL="0">
+            <a:pPr marL="0" indent="0" algn="ctr">
               <a:buNone/>
             </a:pPr>
             <a:r>
@@ -3299,7 +3228,7 @@
           <a:bodyPr wrap="square" lIns="0" tIns="0" rIns="0" bIns="0" rtlCol="0" anchor="ctr"/>
           <a:lstStyle/>
           <a:p>
-            <a:pPr indent="0" marL="0">
+            <a:pPr marL="0" indent="0">
               <a:buNone/>
             </a:pPr>
             <a:r>
@@ -3316,7 +3245,7 @@
             <a:endParaRPr lang="en-US" sz="1300" dirty="0"/>
           </a:p>
           <a:p>
-            <a:pPr indent="0" marL="0">
+            <a:pPr marL="0" indent="0">
               <a:buNone/>
             </a:pPr>
             <a:r>
@@ -3333,7 +3262,7 @@
             <a:endParaRPr lang="en-US" sz="1300" dirty="0"/>
           </a:p>
           <a:p>
-            <a:pPr indent="0" marL="0">
+            <a:pPr marL="0" indent="0">
               <a:buNone/>
             </a:pPr>
             <a:r>
@@ -3350,7 +3279,7 @@
             <a:endParaRPr lang="en-US" sz="1300" dirty="0"/>
           </a:p>
           <a:p>
-            <a:pPr indent="0" marL="0">
+            <a:pPr marL="0" indent="0">
               <a:buNone/>
             </a:pPr>
             <a:r>
@@ -3367,7 +3296,7 @@
             <a:endParaRPr lang="en-US" sz="1300" dirty="0"/>
           </a:p>
           <a:p>
-            <a:pPr indent="0" marL="0">
+            <a:pPr marL="0" indent="0">
               <a:buNone/>
             </a:pPr>
             <a:r>
@@ -3384,13 +3313,13 @@
             <a:endParaRPr lang="en-US" sz="1300" dirty="0"/>
           </a:p>
           <a:p>
-            <a:pPr indent="0" marL="0">
+            <a:pPr marL="0" indent="0">
               <a:buNone/>
             </a:pPr>
             <a:endParaRPr lang="en-US" sz="1300" dirty="0"/>
           </a:p>
           <a:p>
-            <a:pPr indent="0" marL="0">
+            <a:pPr marL="0" indent="0">
               <a:buNone/>
             </a:pPr>
             <a:r>
@@ -3407,7 +3336,7 @@
             <a:endParaRPr lang="en-US" sz="1300" dirty="0"/>
           </a:p>
           <a:p>
-            <a:pPr indent="0" marL="0">
+            <a:pPr marL="0" indent="0">
               <a:buNone/>
             </a:pPr>
             <a:r>
@@ -3424,7 +3353,7 @@
             <a:endParaRPr lang="en-US" sz="1300" dirty="0"/>
           </a:p>
           <a:p>
-            <a:pPr indent="0" marL="0">
+            <a:pPr marL="0" indent="0">
               <a:buNone/>
             </a:pPr>
             <a:r>
@@ -3462,7 +3391,7 @@
           </a:prstGeom>
           <a:extLst>
             <a:ext uri="{C572A759-6A51-4108-AA02-DFA0A04FC94B}">
-              <ma14:wrappingTextBoxFlag xmlns:ma14="http://schemas.microsoft.com/office/mac/drawingml/2011/main" val="0"/>
+              <ma14:wrappingTextBoxFlag xmlns:ma14="http://schemas.microsoft.com/office/mac/drawingml/2011/main" xmlns="" val="0"/>
             </a:ext>
           </a:extLst>
         </p:spPr>
@@ -3480,7 +3409,7 @@
           <a:p>
             <a:pPr algn="l"/>
             <a:fld id="{F7021451-1387-4CA6-816F-3879F97B5CBC}" type="slidenum">
-              <a:rPr b="0" lang="en-US"/>
+              <a:rPr lang="en-US" b="0"/>
               <a:t>10</a:t>
             </a:fld>
             <a:endParaRPr lang="en-US"/>
@@ -3515,9 +3444,11 @@
       <p:sp>
         <p:nvSpPr>
           <p:cNvPr id="2" name="Text 0"/>
-          <p:cNvSpPr/>
+          <p:cNvSpPr>
+            <a:spLocks noGrp="1"/>
+          </p:cNvSpPr>
           <p:nvPr>
-            <p:ph idx="100" type="title" hasCustomPrompt="1"/>
+            <p:ph type="title" idx="100" hasCustomPrompt="1"/>
           </p:nvPr>
         </p:nvSpPr>
         <p:spPr>
@@ -3535,7 +3466,7 @@
           <a:bodyPr wrap="square" lIns="0" tIns="0" rIns="0" bIns="0" rtlCol="0" anchor="ctr"/>
           <a:lstStyle/>
           <a:p>
-            <a:pPr algn="l" indent="0" marL="0">
+            <a:pPr marL="0" indent="0" algn="l">
               <a:buNone/>
             </a:pPr>
             <a:r>
@@ -3594,14 +3525,14 @@
       </p:sp>
       <p:pic>
         <p:nvPicPr>
-          <p:cNvPr id="6" name="icon" descr="preencoded.png">    </p:cNvPr>
+          <p:cNvPr id="6" name="icon" descr="preencoded.png"/>
           <p:cNvPicPr>
             <a:picLocks noChangeAspect="1"/>
           </p:cNvPicPr>
           <p:nvPr/>
         </p:nvPicPr>
         <p:blipFill>
-          <a:blip r:embed="rId1"/>
+          <a:blip r:embed="rId3"/>
           <a:stretch>
             <a:fillRect/>
           </a:stretch>
@@ -3637,7 +3568,7 @@
           <a:bodyPr wrap="square" lIns="0" tIns="0" rIns="0" bIns="0" rtlCol="0" anchor="t"/>
           <a:lstStyle/>
           <a:p>
-            <a:pPr indent="0" marL="0">
+            <a:pPr marL="0" indent="0">
               <a:buNone/>
             </a:pPr>
             <a:r>
@@ -3780,15 +3711,27 @@
         </p:nvGraphicFramePr>
         <p:xfrm>
           <a:off x="6035040" y="1463040"/>
-          <a:ext cx="5669280" cy="914400"/>
+          <a:ext cx="5669280" cy="3520440"/>
         </p:xfrm>
         <a:graphic>
           <a:graphicData uri="http://schemas.openxmlformats.org/drawingml/2006/table">
             <a:tbl>
               <a:tblPr/>
               <a:tblGrid>
-                <a:gridCol w="1828800"/>
-                <a:gridCol w="3840480"/>
+                <a:gridCol w="1828800">
+                  <a:extLst>
+                    <a:ext uri="{9D8B030D-6E8A-4147-A177-3AD203B41FA5}">
+                      <a16:colId xmlns:a16="http://schemas.microsoft.com/office/drawing/2014/main" val="20000"/>
+                    </a:ext>
+                  </a:extLst>
+                </a:gridCol>
+                <a:gridCol w="3840480">
+                  <a:extLst>
+                    <a:ext uri="{9D8B030D-6E8A-4147-A177-3AD203B41FA5}">
+                      <a16:colId xmlns:a16="http://schemas.microsoft.com/office/drawing/2014/main" val="20001"/>
+                    </a:ext>
+                  </a:extLst>
+                </a:gridCol>
               </a:tblGrid>
               <a:tr h="502920">
                 <a:tc>
@@ -3796,7 +3739,7 @@
                     <a:bodyPr/>
                     <a:lstStyle/>
                     <a:p>
-                      <a:pPr indent="0" marL="0">
+                      <a:pPr marL="0" indent="0">
                         <a:buNone/>
                       </a:pPr>
                       <a:r>
@@ -3810,7 +3753,7 @@
                       <a:endParaRPr lang="en-US" sz="1400" dirty="0"/>
                     </a:p>
                   </a:txBody>
-                  <a:tcPr marL="91440" marR="91440" marT="0" marB="0" anchor="ctr">
+                  <a:tcPr marT="0" marB="0" anchor="ctr">
                     <a:lnL w="6350" cap="flat" cmpd="sng" algn="ctr">
                       <a:solidFill>
                         <a:srgbClr val="D1D5DB"/>
@@ -3857,7 +3800,7 @@
                     <a:bodyPr/>
                     <a:lstStyle/>
                     <a:p>
-                      <a:pPr indent="0" marL="0">
+                      <a:pPr marL="0" indent="0">
                         <a:buNone/>
                       </a:pPr>
                       <a:r>
@@ -3871,7 +3814,7 @@
                       <a:endParaRPr lang="en-US" sz="1400" dirty="0"/>
                     </a:p>
                   </a:txBody>
-                  <a:tcPr marL="91440" marR="91440" marT="0" marB="0" anchor="ctr">
+                  <a:tcPr marT="0" marB="0" anchor="ctr">
                     <a:lnL w="6350" cap="flat" cmpd="sng" algn="ctr">
                       <a:solidFill>
                         <a:srgbClr val="D1D5DB"/>
@@ -3913,6 +3856,11 @@
                     </a:solidFill>
                   </a:tcPr>
                 </a:tc>
+                <a:extLst>
+                  <a:ext uri="{0D108BD9-81ED-4DB2-BD59-A6C34878D82A}">
+                    <a16:rowId xmlns:a16="http://schemas.microsoft.com/office/drawing/2014/main" val="10000"/>
+                  </a:ext>
+                </a:extLst>
               </a:tr>
               <a:tr h="502920">
                 <a:tc>
@@ -3920,7 +3868,7 @@
                     <a:bodyPr/>
                     <a:lstStyle/>
                     <a:p>
-                      <a:pPr indent="0" marL="0">
+                      <a:pPr marL="0" indent="0">
                         <a:buNone/>
                       </a:pPr>
                       <a:r>
@@ -3934,7 +3882,7 @@
                       <a:endParaRPr lang="en-US" sz="1400" dirty="0"/>
                     </a:p>
                   </a:txBody>
-                  <a:tcPr marL="91440" marR="91440" marT="0" marB="0" anchor="ctr">
+                  <a:tcPr marT="0" marB="0" anchor="ctr">
                     <a:lnL w="6350" cap="flat" cmpd="sng" algn="ctr">
                       <a:solidFill>
                         <a:srgbClr val="D1D5DB"/>
@@ -3978,7 +3926,7 @@
                     <a:bodyPr/>
                     <a:lstStyle/>
                     <a:p>
-                      <a:pPr indent="0" marL="0">
+                      <a:pPr marL="0" indent="0">
                         <a:buNone/>
                       </a:pPr>
                       <a:r>
@@ -3992,7 +3940,7 @@
                       <a:endParaRPr lang="en-US" sz="1400" dirty="0"/>
                     </a:p>
                   </a:txBody>
-                  <a:tcPr marL="91440" marR="91440" marT="0" marB="0" anchor="ctr">
+                  <a:tcPr marT="0" marB="0" anchor="ctr">
                     <a:lnL w="6350" cap="flat" cmpd="sng" algn="ctr">
                       <a:solidFill>
                         <a:srgbClr val="D1D5DB"/>
@@ -4031,6 +3979,11 @@
                     </a:lnB>
                   </a:tcPr>
                 </a:tc>
+                <a:extLst>
+                  <a:ext uri="{0D108BD9-81ED-4DB2-BD59-A6C34878D82A}">
+                    <a16:rowId xmlns:a16="http://schemas.microsoft.com/office/drawing/2014/main" val="10001"/>
+                  </a:ext>
+                </a:extLst>
               </a:tr>
               <a:tr h="502920">
                 <a:tc>
@@ -4038,7 +3991,7 @@
                     <a:bodyPr/>
                     <a:lstStyle/>
                     <a:p>
-                      <a:pPr indent="0" marL="0">
+                      <a:pPr marL="0" indent="0">
                         <a:buNone/>
                       </a:pPr>
                       <a:r>
@@ -4052,7 +4005,7 @@
                       <a:endParaRPr lang="en-US" sz="1400" dirty="0"/>
                     </a:p>
                   </a:txBody>
-                  <a:tcPr marL="91440" marR="91440" marT="0" marB="0" anchor="ctr">
+                  <a:tcPr marT="0" marB="0" anchor="ctr">
                     <a:lnL w="6350" cap="flat" cmpd="sng" algn="ctr">
                       <a:solidFill>
                         <a:srgbClr val="D1D5DB"/>
@@ -4096,7 +4049,7 @@
                     <a:bodyPr/>
                     <a:lstStyle/>
                     <a:p>
-                      <a:pPr indent="0" marL="0">
+                      <a:pPr marL="0" indent="0">
                         <a:buNone/>
                       </a:pPr>
                       <a:r>
@@ -4110,7 +4063,7 @@
                       <a:endParaRPr lang="en-US" sz="1400" dirty="0"/>
                     </a:p>
                   </a:txBody>
-                  <a:tcPr marL="91440" marR="91440" marT="0" marB="0" anchor="ctr">
+                  <a:tcPr marT="0" marB="0" anchor="ctr">
                     <a:lnL w="6350" cap="flat" cmpd="sng" algn="ctr">
                       <a:solidFill>
                         <a:srgbClr val="D1D5DB"/>
@@ -4149,6 +4102,11 @@
                     </a:lnB>
                   </a:tcPr>
                 </a:tc>
+                <a:extLst>
+                  <a:ext uri="{0D108BD9-81ED-4DB2-BD59-A6C34878D82A}">
+                    <a16:rowId xmlns:a16="http://schemas.microsoft.com/office/drawing/2014/main" val="10002"/>
+                  </a:ext>
+                </a:extLst>
               </a:tr>
               <a:tr h="502920">
                 <a:tc>
@@ -4156,7 +4114,7 @@
                     <a:bodyPr/>
                     <a:lstStyle/>
                     <a:p>
-                      <a:pPr indent="0" marL="0">
+                      <a:pPr marL="0" indent="0">
                         <a:buNone/>
                       </a:pPr>
                       <a:r>
@@ -4170,7 +4128,7 @@
                       <a:endParaRPr lang="en-US" sz="1400" dirty="0"/>
                     </a:p>
                   </a:txBody>
-                  <a:tcPr marL="91440" marR="91440" marT="0" marB="0" anchor="ctr">
+                  <a:tcPr marT="0" marB="0" anchor="ctr">
                     <a:lnL w="6350" cap="flat" cmpd="sng" algn="ctr">
                       <a:solidFill>
                         <a:srgbClr val="D1D5DB"/>
@@ -4214,7 +4172,7 @@
                     <a:bodyPr/>
                     <a:lstStyle/>
                     <a:p>
-                      <a:pPr indent="0" marL="0">
+                      <a:pPr marL="0" indent="0">
                         <a:buNone/>
                       </a:pPr>
                       <a:r>
@@ -4228,7 +4186,7 @@
                       <a:endParaRPr lang="en-US" sz="1400" dirty="0"/>
                     </a:p>
                   </a:txBody>
-                  <a:tcPr marL="91440" marR="91440" marT="0" marB="0" anchor="ctr">
+                  <a:tcPr marT="0" marB="0" anchor="ctr">
                     <a:lnL w="6350" cap="flat" cmpd="sng" algn="ctr">
                       <a:solidFill>
                         <a:srgbClr val="D1D5DB"/>
@@ -4267,6 +4225,11 @@
                     </a:lnB>
                   </a:tcPr>
                 </a:tc>
+                <a:extLst>
+                  <a:ext uri="{0D108BD9-81ED-4DB2-BD59-A6C34878D82A}">
+                    <a16:rowId xmlns:a16="http://schemas.microsoft.com/office/drawing/2014/main" val="10003"/>
+                  </a:ext>
+                </a:extLst>
               </a:tr>
               <a:tr h="502920">
                 <a:tc>
@@ -4274,7 +4237,7 @@
                     <a:bodyPr/>
                     <a:lstStyle/>
                     <a:p>
-                      <a:pPr indent="0" marL="0">
+                      <a:pPr marL="0" indent="0">
                         <a:buNone/>
                       </a:pPr>
                       <a:r>
@@ -4288,7 +4251,7 @@
                       <a:endParaRPr lang="en-US" sz="1400" dirty="0"/>
                     </a:p>
                   </a:txBody>
-                  <a:tcPr marL="91440" marR="91440" marT="0" marB="0" anchor="ctr">
+                  <a:tcPr marT="0" marB="0" anchor="ctr">
                     <a:lnL w="6350" cap="flat" cmpd="sng" algn="ctr">
                       <a:solidFill>
                         <a:srgbClr val="D1D5DB"/>
@@ -4332,7 +4295,7 @@
                     <a:bodyPr/>
                     <a:lstStyle/>
                     <a:p>
-                      <a:pPr indent="0" marL="0">
+                      <a:pPr marL="0" indent="0">
                         <a:buNone/>
                       </a:pPr>
                       <a:r>
@@ -4346,7 +4309,7 @@
                       <a:endParaRPr lang="en-US" sz="1400" dirty="0"/>
                     </a:p>
                   </a:txBody>
-                  <a:tcPr marL="91440" marR="91440" marT="0" marB="0" anchor="ctr">
+                  <a:tcPr marT="0" marB="0" anchor="ctr">
                     <a:lnL w="6350" cap="flat" cmpd="sng" algn="ctr">
                       <a:solidFill>
                         <a:srgbClr val="D1D5DB"/>
@@ -4385,6 +4348,11 @@
                     </a:lnB>
                   </a:tcPr>
                 </a:tc>
+                <a:extLst>
+                  <a:ext uri="{0D108BD9-81ED-4DB2-BD59-A6C34878D82A}">
+                    <a16:rowId xmlns:a16="http://schemas.microsoft.com/office/drawing/2014/main" val="10004"/>
+                  </a:ext>
+                </a:extLst>
               </a:tr>
               <a:tr h="502920">
                 <a:tc>
@@ -4392,7 +4360,7 @@
                     <a:bodyPr/>
                     <a:lstStyle/>
                     <a:p>
-                      <a:pPr indent="0" marL="0">
+                      <a:pPr marL="0" indent="0">
                         <a:buNone/>
                       </a:pPr>
                       <a:r>
@@ -4406,7 +4374,7 @@
                       <a:endParaRPr lang="en-US" sz="1400" dirty="0"/>
                     </a:p>
                   </a:txBody>
-                  <a:tcPr marL="91440" marR="91440" marT="0" marB="0" anchor="ctr">
+                  <a:tcPr marT="0" marB="0" anchor="ctr">
                     <a:lnL w="6350" cap="flat" cmpd="sng" algn="ctr">
                       <a:solidFill>
                         <a:srgbClr val="D1D5DB"/>
@@ -4450,7 +4418,7 @@
                     <a:bodyPr/>
                     <a:lstStyle/>
                     <a:p>
-                      <a:pPr indent="0" marL="0">
+                      <a:pPr marL="0" indent="0">
                         <a:buNone/>
                       </a:pPr>
                       <a:r>
@@ -4464,7 +4432,7 @@
                       <a:endParaRPr lang="en-US" sz="1400" dirty="0"/>
                     </a:p>
                   </a:txBody>
-                  <a:tcPr marL="91440" marR="91440" marT="0" marB="0" anchor="ctr">
+                  <a:tcPr marT="0" marB="0" anchor="ctr">
                     <a:lnL w="6350" cap="flat" cmpd="sng" algn="ctr">
                       <a:solidFill>
                         <a:srgbClr val="D1D5DB"/>
@@ -4503,6 +4471,11 @@
                     </a:lnB>
                   </a:tcPr>
                 </a:tc>
+                <a:extLst>
+                  <a:ext uri="{0D108BD9-81ED-4DB2-BD59-A6C34878D82A}">
+                    <a16:rowId xmlns:a16="http://schemas.microsoft.com/office/drawing/2014/main" val="10005"/>
+                  </a:ext>
+                </a:extLst>
               </a:tr>
               <a:tr h="502920">
                 <a:tc>
@@ -4510,7 +4483,7 @@
                     <a:bodyPr/>
                     <a:lstStyle/>
                     <a:p>
-                      <a:pPr indent="0" marL="0">
+                      <a:pPr marL="0" indent="0">
                         <a:buNone/>
                       </a:pPr>
                       <a:r>
@@ -4524,7 +4497,7 @@
                       <a:endParaRPr lang="en-US" sz="1400" dirty="0"/>
                     </a:p>
                   </a:txBody>
-                  <a:tcPr marL="91440" marR="91440" marT="0" marB="0" anchor="ctr">
+                  <a:tcPr marT="0" marB="0" anchor="ctr">
                     <a:lnL w="6350" cap="flat" cmpd="sng" algn="ctr">
                       <a:solidFill>
                         <a:srgbClr val="D1D5DB"/>
@@ -4568,7 +4541,7 @@
                     <a:bodyPr/>
                     <a:lstStyle/>
                     <a:p>
-                      <a:pPr indent="0" marL="0">
+                      <a:pPr marL="0" indent="0">
                         <a:buNone/>
                       </a:pPr>
                       <a:r>
@@ -4582,7 +4555,7 @@
                       <a:endParaRPr lang="en-US" sz="1400" dirty="0"/>
                     </a:p>
                   </a:txBody>
-                  <a:tcPr marL="91440" marR="91440" marT="0" marB="0" anchor="ctr">
+                  <a:tcPr marT="0" marB="0" anchor="ctr">
                     <a:lnL w="6350" cap="flat" cmpd="sng" algn="ctr">
                       <a:solidFill>
                         <a:srgbClr val="D1D5DB"/>
@@ -4621,6 +4594,11 @@
                     </a:lnB>
                   </a:tcPr>
                 </a:tc>
+                <a:extLst>
+                  <a:ext uri="{0D108BD9-81ED-4DB2-BD59-A6C34878D82A}">
+                    <a16:rowId xmlns:a16="http://schemas.microsoft.com/office/drawing/2014/main" val="10006"/>
+                  </a:ext>
+                </a:extLst>
               </a:tr>
             </a:tbl>
           </a:graphicData>
@@ -4647,7 +4625,7 @@
           <a:bodyPr wrap="square" lIns="0" tIns="0" rIns="0" bIns="0" rtlCol="0" anchor="t"/>
           <a:lstStyle/>
           <a:p>
-            <a:pPr indent="0" marL="0">
+            <a:pPr marL="0" indent="0">
               <a:buNone/>
             </a:pPr>
             <a:r>
@@ -4682,7 +4660,7 @@
           </a:prstGeom>
           <a:extLst>
             <a:ext uri="{C572A759-6A51-4108-AA02-DFA0A04FC94B}">
-              <ma14:wrappingTextBoxFlag xmlns:ma14="http://schemas.microsoft.com/office/mac/drawingml/2011/main" val="0"/>
+              <ma14:wrappingTextBoxFlag xmlns:ma14="http://schemas.microsoft.com/office/mac/drawingml/2011/main" xmlns="" val="0"/>
             </a:ext>
           </a:extLst>
         </p:spPr>
@@ -4700,7 +4678,7 @@
           <a:p>
             <a:pPr algn="l"/>
             <a:fld id="{F7021451-1387-4CA6-816F-3879F97B5CBC}" type="slidenum">
-              <a:rPr b="0" lang="en-US"/>
+              <a:rPr lang="en-US" b="0"/>
               <a:t>11</a:t>
             </a:fld>
             <a:endParaRPr lang="en-US"/>
@@ -4735,9 +4713,11 @@
       <p:sp>
         <p:nvSpPr>
           <p:cNvPr id="2" name="Text 0"/>
-          <p:cNvSpPr/>
+          <p:cNvSpPr>
+            <a:spLocks noGrp="1"/>
+          </p:cNvSpPr>
           <p:nvPr>
-            <p:ph idx="100" type="title" hasCustomPrompt="1"/>
+            <p:ph type="title" idx="100" hasCustomPrompt="1"/>
           </p:nvPr>
         </p:nvSpPr>
         <p:spPr>
@@ -4755,7 +4735,7 @@
           <a:bodyPr wrap="square" lIns="0" tIns="0" rIns="0" bIns="0" rtlCol="0" anchor="ctr"/>
           <a:lstStyle/>
           <a:p>
-            <a:pPr algn="l" indent="0" marL="0">
+            <a:pPr marL="0" indent="0" algn="l">
               <a:buNone/>
             </a:pPr>
             <a:r>
@@ -4814,283 +4794,7 @@
       </p:sp>
       <p:pic>
         <p:nvPicPr>
-          <p:cNvPr id="6" name="icon" descr="preencoded.png">    </p:cNvPr>
-          <p:cNvPicPr>
-            <a:picLocks noChangeAspect="1"/>
-          </p:cNvPicPr>
-          <p:nvPr/>
-        </p:nvPicPr>
-        <p:blipFill>
-          <a:blip r:embed="rId1"/>
-          <a:stretch>
-            <a:fillRect/>
-          </a:stretch>
-        </p:blipFill>
-        <p:spPr>
-          <a:xfrm>
-            <a:off x="1039673" y="1999793"/>
-            <a:ext cx="435254" cy="435254"/>
-          </a:xfrm>
-          <a:prstGeom prst="rect">
-            <a:avLst/>
-          </a:prstGeom>
-        </p:spPr>
-      </p:pic>
-      <p:sp>
-        <p:nvSpPr>
-          <p:cNvPr id="7" name="Text 3"/>
-          <p:cNvSpPr txBox="1"/>
-          <p:nvPr/>
-        </p:nvSpPr>
-        <p:spPr>
-          <a:xfrm>
-            <a:off x="1920240" y="1828800"/>
-            <a:ext cx="3749040" cy="457200"/>
-          </a:xfrm>
-          <a:prstGeom prst="rect">
-            <a:avLst/>
-          </a:prstGeom>
-          <a:noFill/>
-          <a:ln/>
-        </p:spPr>
-        <p:txBody>
-          <a:bodyPr wrap="square" lIns="0" tIns="0" rIns="0" bIns="0" rtlCol="0" anchor="t"/>
-          <a:lstStyle/>
-          <a:p>
-            <a:pPr indent="0" marL="0">
-              <a:buNone/>
-            </a:pPr>
-            <a:r>
-              <a:rPr lang="en-US" sz="2000" b="1" dirty="0">
-                <a:solidFill>
-                  <a:schemeClr val="tx1"/>
-                </a:solidFill>
-              </a:rPr>
-              <a:t>Password hashing</a:t>
-            </a:r>
-            <a:endParaRPr lang="en-US" sz="2000" dirty="0"/>
-          </a:p>
-        </p:txBody>
-      </p:sp>
-      <p:sp>
-        <p:nvSpPr>
-          <p:cNvPr id="8" name="Text 4"/>
-          <p:cNvSpPr txBox="1"/>
-          <p:nvPr/>
-        </p:nvSpPr>
-        <p:spPr>
-          <a:xfrm>
-            <a:off x="1920240" y="2377440"/>
-            <a:ext cx="3749040" cy="1097280"/>
-          </a:xfrm>
-          <a:prstGeom prst="rect">
-            <a:avLst/>
-          </a:prstGeom>
-          <a:noFill/>
-          <a:ln/>
-        </p:spPr>
-        <p:txBody>
-          <a:bodyPr wrap="square" lIns="0" tIns="0" rIns="0" bIns="0" rtlCol="0" anchor="t"/>
-          <a:lstStyle/>
-          <a:p>
-            <a:pPr indent="0" marL="0">
-              <a:buNone/>
-            </a:pPr>
-            <a:r>
-              <a:rPr lang="en-US" sz="1400" dirty="0">
-                <a:solidFill>
-                  <a:schemeClr val="tx1"/>
-                </a:solidFill>
-              </a:rPr>
-              <a:t>PBKDF2-HMAC-SHA256 with a random salt. Plain passwords are never stored.</a:t>
-            </a:r>
-            <a:endParaRPr lang="en-US" sz="1400" dirty="0"/>
-          </a:p>
-        </p:txBody>
-      </p:sp>
-      <p:sp>
-        <p:nvSpPr>
-          <p:cNvPr id="9" name="sec-card"/>
-          <p:cNvSpPr/>
-          <p:nvPr/>
-        </p:nvSpPr>
-        <p:spPr>
-          <a:xfrm>
-            <a:off x="6263640" y="1463040"/>
-            <a:ext cx="5394960" cy="2148840"/>
-          </a:xfrm>
-          <a:prstGeom prst="roundRect">
-            <a:avLst>
-              <a:gd name="adj" fmla="val 5106"/>
-            </a:avLst>
-          </a:prstGeom>
-          <a:solidFill>
-            <a:schemeClr val="bg2"/>
-          </a:solidFill>
-          <a:ln/>
-        </p:spPr>
-      </p:sp>
-      <p:sp>
-        <p:nvSpPr>
-          <p:cNvPr id="10" name="icon-circle"/>
-          <p:cNvSpPr/>
-          <p:nvPr/>
-        </p:nvSpPr>
-        <p:spPr>
-          <a:xfrm>
-            <a:off x="6583680" y="1828800"/>
-            <a:ext cx="777240" cy="777240"/>
-          </a:xfrm>
-          <a:prstGeom prst="ellipse">
-            <a:avLst/>
-          </a:prstGeom>
-          <a:solidFill>
-            <a:schemeClr val="accent2"/>
-          </a:solidFill>
-          <a:ln/>
-        </p:spPr>
-      </p:sp>
-      <p:pic>
-        <p:nvPicPr>
-          <p:cNvPr id="11" name="icon" descr="preencoded.png">    </p:cNvPr>
-          <p:cNvPicPr>
-            <a:picLocks noChangeAspect="1"/>
-          </p:cNvPicPr>
-          <p:nvPr/>
-        </p:nvPicPr>
-        <p:blipFill>
-          <a:blip r:embed="rId2"/>
-          <a:stretch>
-            <a:fillRect/>
-          </a:stretch>
-        </p:blipFill>
-        <p:spPr>
-          <a:xfrm>
-            <a:off x="6754673" y="1999793"/>
-            <a:ext cx="435254" cy="435254"/>
-          </a:xfrm>
-          <a:prstGeom prst="rect">
-            <a:avLst/>
-          </a:prstGeom>
-        </p:spPr>
-      </p:pic>
-      <p:sp>
-        <p:nvSpPr>
-          <p:cNvPr id="12" name="Text 7"/>
-          <p:cNvSpPr txBox="1"/>
-          <p:nvPr/>
-        </p:nvSpPr>
-        <p:spPr>
-          <a:xfrm>
-            <a:off x="7635240" y="1828800"/>
-            <a:ext cx="3749040" cy="457200"/>
-          </a:xfrm>
-          <a:prstGeom prst="rect">
-            <a:avLst/>
-          </a:prstGeom>
-          <a:noFill/>
-          <a:ln/>
-        </p:spPr>
-        <p:txBody>
-          <a:bodyPr wrap="square" lIns="0" tIns="0" rIns="0" bIns="0" rtlCol="0" anchor="t"/>
-          <a:lstStyle/>
-          <a:p>
-            <a:pPr indent="0" marL="0">
-              <a:buNone/>
-            </a:pPr>
-            <a:r>
-              <a:rPr lang="en-US" sz="2000" b="1" dirty="0">
-                <a:solidFill>
-                  <a:schemeClr val="tx1"/>
-                </a:solidFill>
-              </a:rPr>
-              <a:t>SQL injection</a:t>
-            </a:r>
-            <a:endParaRPr lang="en-US" sz="2000" dirty="0"/>
-          </a:p>
-        </p:txBody>
-      </p:sp>
-      <p:sp>
-        <p:nvSpPr>
-          <p:cNvPr id="13" name="Text 8"/>
-          <p:cNvSpPr txBox="1"/>
-          <p:nvPr/>
-        </p:nvSpPr>
-        <p:spPr>
-          <a:xfrm>
-            <a:off x="7635240" y="2377440"/>
-            <a:ext cx="3749040" cy="1097280"/>
-          </a:xfrm>
-          <a:prstGeom prst="rect">
-            <a:avLst/>
-          </a:prstGeom>
-          <a:noFill/>
-          <a:ln/>
-        </p:spPr>
-        <p:txBody>
-          <a:bodyPr wrap="square" lIns="0" tIns="0" rIns="0" bIns="0" rtlCol="0" anchor="t"/>
-          <a:lstStyle/>
-          <a:p>
-            <a:pPr indent="0" marL="0">
-              <a:buNone/>
-            </a:pPr>
-            <a:r>
-              <a:rPr lang="en-US" sz="1400" dirty="0">
-                <a:solidFill>
-                  <a:schemeClr val="tx1"/>
-                </a:solidFill>
-              </a:rPr>
-              <a:t>Every query uses PreparedStatement with bound parameters.</a:t>
-            </a:r>
-            <a:endParaRPr lang="en-US" sz="1400" dirty="0"/>
-          </a:p>
-        </p:txBody>
-      </p:sp>
-      <p:sp>
-        <p:nvSpPr>
-          <p:cNvPr id="14" name="sec-card"/>
-          <p:cNvSpPr/>
-          <p:nvPr/>
-        </p:nvSpPr>
-        <p:spPr>
-          <a:xfrm>
-            <a:off x="548640" y="3840480"/>
-            <a:ext cx="5394960" cy="2148840"/>
-          </a:xfrm>
-          <a:prstGeom prst="roundRect">
-            <a:avLst>
-              <a:gd name="adj" fmla="val 5106"/>
-            </a:avLst>
-          </a:prstGeom>
-          <a:solidFill>
-            <a:schemeClr val="bg2"/>
-          </a:solidFill>
-          <a:ln/>
-        </p:spPr>
-      </p:sp>
-      <p:sp>
-        <p:nvSpPr>
-          <p:cNvPr id="15" name="icon-circle"/>
-          <p:cNvSpPr/>
-          <p:nvPr/>
-        </p:nvSpPr>
-        <p:spPr>
-          <a:xfrm>
-            <a:off x="868680" y="4206240"/>
-            <a:ext cx="777240" cy="777240"/>
-          </a:xfrm>
-          <a:prstGeom prst="ellipse">
-            <a:avLst/>
-          </a:prstGeom>
-          <a:solidFill>
-            <a:schemeClr val="accent1"/>
-          </a:solidFill>
-          <a:ln/>
-        </p:spPr>
-      </p:sp>
-      <p:pic>
-        <p:nvPicPr>
-          <p:cNvPr id="16" name="icon" descr="preencoded.png">    </p:cNvPr>
+          <p:cNvPr id="6" name="icon" descr="preencoded.png"/>
           <p:cNvPicPr>
             <a:picLocks noChangeAspect="1"/>
           </p:cNvPicPr>
@@ -5104,7 +4808,7 @@
         </p:blipFill>
         <p:spPr>
           <a:xfrm>
-            <a:off x="1039673" y="4377233"/>
+            <a:off x="1039673" y="1999793"/>
             <a:ext cx="435254" cy="435254"/>
           </a:xfrm>
           <a:prstGeom prst="rect">
@@ -5114,13 +4818,13 @@
       </p:pic>
       <p:sp>
         <p:nvSpPr>
-          <p:cNvPr id="17" name="Text 11"/>
+          <p:cNvPr id="7" name="Text 3"/>
           <p:cNvSpPr txBox="1"/>
           <p:nvPr/>
         </p:nvSpPr>
         <p:spPr>
           <a:xfrm>
-            <a:off x="1920240" y="4206240"/>
+            <a:off x="1920240" y="1828800"/>
             <a:ext cx="3749040" cy="457200"/>
           </a:xfrm>
           <a:prstGeom prst="rect">
@@ -5133,7 +4837,7 @@
           <a:bodyPr wrap="square" lIns="0" tIns="0" rIns="0" bIns="0" rtlCol="0" anchor="t"/>
           <a:lstStyle/>
           <a:p>
-            <a:pPr indent="0" marL="0">
+            <a:pPr marL="0" indent="0">
               <a:buNone/>
             </a:pPr>
             <a:r>
@@ -5142,7 +4846,7 @@
                   <a:schemeClr val="tx1"/>
                 </a:solidFill>
               </a:rPr>
-              <a:t>Cross-site scripting</a:t>
+              <a:t>Password hashing</a:t>
             </a:r>
             <a:endParaRPr lang="en-US" sz="2000" dirty="0"/>
           </a:p>
@@ -5150,13 +4854,13 @@
       </p:sp>
       <p:sp>
         <p:nvSpPr>
-          <p:cNvPr id="18" name="Text 12"/>
+          <p:cNvPr id="8" name="Text 4"/>
           <p:cNvSpPr txBox="1"/>
           <p:nvPr/>
         </p:nvSpPr>
         <p:spPr>
           <a:xfrm>
-            <a:off x="1920240" y="4754880"/>
+            <a:off x="1920240" y="2377440"/>
             <a:ext cx="3749040" cy="1097280"/>
           </a:xfrm>
           <a:prstGeom prst="rect">
@@ -5169,7 +4873,7 @@
           <a:bodyPr wrap="square" lIns="0" tIns="0" rIns="0" bIns="0" rtlCol="0" anchor="t"/>
           <a:lstStyle/>
           <a:p>
-            <a:pPr indent="0" marL="0">
+            <a:pPr marL="0" indent="0">
               <a:buNone/>
             </a:pPr>
             <a:r>
@@ -5178,7 +4882,7 @@
                   <a:schemeClr val="tx1"/>
                 </a:solidFill>
               </a:rPr>
-              <a:t>All JSP output goes through c:out so user text is escaped.</a:t>
+              <a:t>PBKDF2-HMAC-SHA256 with a random salt. Plain passwords are never stored.</a:t>
             </a:r>
             <a:endParaRPr lang="en-US" sz="1400" dirty="0"/>
           </a:p>
@@ -5186,13 +4890,13 @@
       </p:sp>
       <p:sp>
         <p:nvSpPr>
-          <p:cNvPr id="19" name="sec-card"/>
+          <p:cNvPr id="9" name="sec-card"/>
           <p:cNvSpPr/>
           <p:nvPr/>
         </p:nvSpPr>
         <p:spPr>
           <a:xfrm>
-            <a:off x="6263640" y="3840480"/>
+            <a:off x="6263640" y="1463040"/>
             <a:ext cx="5394960" cy="2148840"/>
           </a:xfrm>
           <a:prstGeom prst="roundRect">
@@ -5208,13 +4912,13 @@
       </p:sp>
       <p:sp>
         <p:nvSpPr>
-          <p:cNvPr id="20" name="icon-circle"/>
+          <p:cNvPr id="10" name="icon-circle"/>
           <p:cNvSpPr/>
           <p:nvPr/>
         </p:nvSpPr>
         <p:spPr>
           <a:xfrm>
-            <a:off x="6583680" y="4206240"/>
+            <a:off x="6583680" y="1828800"/>
             <a:ext cx="777240" cy="777240"/>
           </a:xfrm>
           <a:prstGeom prst="ellipse">
@@ -5228,7 +4932,7 @@
       </p:sp>
       <p:pic>
         <p:nvPicPr>
-          <p:cNvPr id="21" name="icon" descr="preencoded.png">    </p:cNvPr>
+          <p:cNvPr id="11" name="icon" descr="preencoded.png"/>
           <p:cNvPicPr>
             <a:picLocks noChangeAspect="1"/>
           </p:cNvPicPr>
@@ -5242,6 +4946,282 @@
         </p:blipFill>
         <p:spPr>
           <a:xfrm>
+            <a:off x="6754673" y="1999793"/>
+            <a:ext cx="435254" cy="435254"/>
+          </a:xfrm>
+          <a:prstGeom prst="rect">
+            <a:avLst/>
+          </a:prstGeom>
+        </p:spPr>
+      </p:pic>
+      <p:sp>
+        <p:nvSpPr>
+          <p:cNvPr id="12" name="Text 7"/>
+          <p:cNvSpPr txBox="1"/>
+          <p:nvPr/>
+        </p:nvSpPr>
+        <p:spPr>
+          <a:xfrm>
+            <a:off x="7635240" y="1828800"/>
+            <a:ext cx="3749040" cy="457200"/>
+          </a:xfrm>
+          <a:prstGeom prst="rect">
+            <a:avLst/>
+          </a:prstGeom>
+          <a:noFill/>
+          <a:ln/>
+        </p:spPr>
+        <p:txBody>
+          <a:bodyPr wrap="square" lIns="0" tIns="0" rIns="0" bIns="0" rtlCol="0" anchor="t"/>
+          <a:lstStyle/>
+          <a:p>
+            <a:pPr marL="0" indent="0">
+              <a:buNone/>
+            </a:pPr>
+            <a:r>
+              <a:rPr lang="en-US" sz="2000" b="1" dirty="0">
+                <a:solidFill>
+                  <a:schemeClr val="tx1"/>
+                </a:solidFill>
+              </a:rPr>
+              <a:t>SQL injection</a:t>
+            </a:r>
+            <a:endParaRPr lang="en-US" sz="2000" dirty="0"/>
+          </a:p>
+        </p:txBody>
+      </p:sp>
+      <p:sp>
+        <p:nvSpPr>
+          <p:cNvPr id="13" name="Text 8"/>
+          <p:cNvSpPr txBox="1"/>
+          <p:nvPr/>
+        </p:nvSpPr>
+        <p:spPr>
+          <a:xfrm>
+            <a:off x="7635240" y="2377440"/>
+            <a:ext cx="3749040" cy="1097280"/>
+          </a:xfrm>
+          <a:prstGeom prst="rect">
+            <a:avLst/>
+          </a:prstGeom>
+          <a:noFill/>
+          <a:ln/>
+        </p:spPr>
+        <p:txBody>
+          <a:bodyPr wrap="square" lIns="0" tIns="0" rIns="0" bIns="0" rtlCol="0" anchor="t"/>
+          <a:lstStyle/>
+          <a:p>
+            <a:pPr marL="0" indent="0">
+              <a:buNone/>
+            </a:pPr>
+            <a:r>
+              <a:rPr lang="en-US" sz="1400" dirty="0">
+                <a:solidFill>
+                  <a:schemeClr val="tx1"/>
+                </a:solidFill>
+              </a:rPr>
+              <a:t>Every query uses PreparedStatement with bound parameters.</a:t>
+            </a:r>
+            <a:endParaRPr lang="en-US" sz="1400" dirty="0"/>
+          </a:p>
+        </p:txBody>
+      </p:sp>
+      <p:sp>
+        <p:nvSpPr>
+          <p:cNvPr id="14" name="sec-card"/>
+          <p:cNvSpPr/>
+          <p:nvPr/>
+        </p:nvSpPr>
+        <p:spPr>
+          <a:xfrm>
+            <a:off x="548640" y="3840480"/>
+            <a:ext cx="5394960" cy="2148840"/>
+          </a:xfrm>
+          <a:prstGeom prst="roundRect">
+            <a:avLst>
+              <a:gd name="adj" fmla="val 5106"/>
+            </a:avLst>
+          </a:prstGeom>
+          <a:solidFill>
+            <a:schemeClr val="bg2"/>
+          </a:solidFill>
+          <a:ln/>
+        </p:spPr>
+      </p:sp>
+      <p:sp>
+        <p:nvSpPr>
+          <p:cNvPr id="15" name="icon-circle"/>
+          <p:cNvSpPr/>
+          <p:nvPr/>
+        </p:nvSpPr>
+        <p:spPr>
+          <a:xfrm>
+            <a:off x="868680" y="4206240"/>
+            <a:ext cx="777240" cy="777240"/>
+          </a:xfrm>
+          <a:prstGeom prst="ellipse">
+            <a:avLst/>
+          </a:prstGeom>
+          <a:solidFill>
+            <a:schemeClr val="accent1"/>
+          </a:solidFill>
+          <a:ln/>
+        </p:spPr>
+      </p:sp>
+      <p:pic>
+        <p:nvPicPr>
+          <p:cNvPr id="16" name="icon" descr="preencoded.png"/>
+          <p:cNvPicPr>
+            <a:picLocks noChangeAspect="1"/>
+          </p:cNvPicPr>
+          <p:nvPr/>
+        </p:nvPicPr>
+        <p:blipFill>
+          <a:blip r:embed="rId5"/>
+          <a:stretch>
+            <a:fillRect/>
+          </a:stretch>
+        </p:blipFill>
+        <p:spPr>
+          <a:xfrm>
+            <a:off x="1039673" y="4377233"/>
+            <a:ext cx="435254" cy="435254"/>
+          </a:xfrm>
+          <a:prstGeom prst="rect">
+            <a:avLst/>
+          </a:prstGeom>
+        </p:spPr>
+      </p:pic>
+      <p:sp>
+        <p:nvSpPr>
+          <p:cNvPr id="17" name="Text 11"/>
+          <p:cNvSpPr txBox="1"/>
+          <p:nvPr/>
+        </p:nvSpPr>
+        <p:spPr>
+          <a:xfrm>
+            <a:off x="1920240" y="4206240"/>
+            <a:ext cx="3749040" cy="457200"/>
+          </a:xfrm>
+          <a:prstGeom prst="rect">
+            <a:avLst/>
+          </a:prstGeom>
+          <a:noFill/>
+          <a:ln/>
+        </p:spPr>
+        <p:txBody>
+          <a:bodyPr wrap="square" lIns="0" tIns="0" rIns="0" bIns="0" rtlCol="0" anchor="t"/>
+          <a:lstStyle/>
+          <a:p>
+            <a:pPr marL="0" indent="0">
+              <a:buNone/>
+            </a:pPr>
+            <a:r>
+              <a:rPr lang="en-US" sz="2000" b="1" dirty="0">
+                <a:solidFill>
+                  <a:schemeClr val="tx1"/>
+                </a:solidFill>
+              </a:rPr>
+              <a:t>Cross-site scripting</a:t>
+            </a:r>
+            <a:endParaRPr lang="en-US" sz="2000" dirty="0"/>
+          </a:p>
+        </p:txBody>
+      </p:sp>
+      <p:sp>
+        <p:nvSpPr>
+          <p:cNvPr id="18" name="Text 12"/>
+          <p:cNvSpPr txBox="1"/>
+          <p:nvPr/>
+        </p:nvSpPr>
+        <p:spPr>
+          <a:xfrm>
+            <a:off x="1920240" y="4754880"/>
+            <a:ext cx="3749040" cy="1097280"/>
+          </a:xfrm>
+          <a:prstGeom prst="rect">
+            <a:avLst/>
+          </a:prstGeom>
+          <a:noFill/>
+          <a:ln/>
+        </p:spPr>
+        <p:txBody>
+          <a:bodyPr wrap="square" lIns="0" tIns="0" rIns="0" bIns="0" rtlCol="0" anchor="t"/>
+          <a:lstStyle/>
+          <a:p>
+            <a:pPr marL="0" indent="0">
+              <a:buNone/>
+            </a:pPr>
+            <a:r>
+              <a:rPr lang="en-US" sz="1400" dirty="0">
+                <a:solidFill>
+                  <a:schemeClr val="tx1"/>
+                </a:solidFill>
+              </a:rPr>
+              <a:t>All JSP output goes through c:out so user text is escaped.</a:t>
+            </a:r>
+            <a:endParaRPr lang="en-US" sz="1400" dirty="0"/>
+          </a:p>
+        </p:txBody>
+      </p:sp>
+      <p:sp>
+        <p:nvSpPr>
+          <p:cNvPr id="19" name="sec-card"/>
+          <p:cNvSpPr/>
+          <p:nvPr/>
+        </p:nvSpPr>
+        <p:spPr>
+          <a:xfrm>
+            <a:off x="6263640" y="3840480"/>
+            <a:ext cx="5394960" cy="2148840"/>
+          </a:xfrm>
+          <a:prstGeom prst="roundRect">
+            <a:avLst>
+              <a:gd name="adj" fmla="val 5106"/>
+            </a:avLst>
+          </a:prstGeom>
+          <a:solidFill>
+            <a:schemeClr val="bg2"/>
+          </a:solidFill>
+          <a:ln/>
+        </p:spPr>
+      </p:sp>
+      <p:sp>
+        <p:nvSpPr>
+          <p:cNvPr id="20" name="icon-circle"/>
+          <p:cNvSpPr/>
+          <p:nvPr/>
+        </p:nvSpPr>
+        <p:spPr>
+          <a:xfrm>
+            <a:off x="6583680" y="4206240"/>
+            <a:ext cx="777240" cy="777240"/>
+          </a:xfrm>
+          <a:prstGeom prst="ellipse">
+            <a:avLst/>
+          </a:prstGeom>
+          <a:solidFill>
+            <a:schemeClr val="accent2"/>
+          </a:solidFill>
+          <a:ln/>
+        </p:spPr>
+      </p:sp>
+      <p:pic>
+        <p:nvPicPr>
+          <p:cNvPr id="21" name="icon" descr="preencoded.png"/>
+          <p:cNvPicPr>
+            <a:picLocks noChangeAspect="1"/>
+          </p:cNvPicPr>
+          <p:nvPr/>
+        </p:nvPicPr>
+        <p:blipFill>
+          <a:blip r:embed="rId6"/>
+          <a:stretch>
+            <a:fillRect/>
+          </a:stretch>
+        </p:blipFill>
+        <p:spPr>
+          <a:xfrm>
             <a:off x="6754673" y="4377233"/>
             <a:ext cx="435254" cy="435254"/>
           </a:xfrm>
@@ -5271,7 +5251,7 @@
           <a:bodyPr wrap="square" lIns="0" tIns="0" rIns="0" bIns="0" rtlCol="0" anchor="t"/>
           <a:lstStyle/>
           <a:p>
-            <a:pPr indent="0" marL="0">
+            <a:pPr marL="0" indent="0">
               <a:buNone/>
             </a:pPr>
             <a:r>
@@ -5307,7 +5287,7 @@
           <a:bodyPr wrap="square" lIns="0" tIns="0" rIns="0" bIns="0" rtlCol="0" anchor="t"/>
           <a:lstStyle/>
           <a:p>
-            <a:pPr indent="0" marL="0">
+            <a:pPr marL="0" indent="0">
               <a:buNone/>
             </a:pPr>
             <a:r>
@@ -5342,7 +5322,7 @@
           </a:prstGeom>
           <a:extLst>
             <a:ext uri="{C572A759-6A51-4108-AA02-DFA0A04FC94B}">
-              <ma14:wrappingTextBoxFlag xmlns:ma14="http://schemas.microsoft.com/office/mac/drawingml/2011/main" val="0"/>
+              <ma14:wrappingTextBoxFlag xmlns:ma14="http://schemas.microsoft.com/office/mac/drawingml/2011/main" xmlns="" val="0"/>
             </a:ext>
           </a:extLst>
         </p:spPr>
@@ -5360,7 +5340,7 @@
           <a:p>
             <a:pPr algn="l"/>
             <a:fld id="{F7021451-1387-4CA6-816F-3879F97B5CBC}" type="slidenum">
-              <a:rPr b="0" lang="en-US"/>
+              <a:rPr lang="en-US" b="0"/>
               <a:t>12</a:t>
             </a:fld>
             <a:endParaRPr lang="en-US"/>
@@ -5395,9 +5375,11 @@
       <p:sp>
         <p:nvSpPr>
           <p:cNvPr id="2" name="Text 0"/>
-          <p:cNvSpPr/>
+          <p:cNvSpPr>
+            <a:spLocks noGrp="1"/>
+          </p:cNvSpPr>
           <p:nvPr>
-            <p:ph idx="100" type="title" hasCustomPrompt="1"/>
+            <p:ph type="title" idx="100" hasCustomPrompt="1"/>
           </p:nvPr>
         </p:nvSpPr>
         <p:spPr>
@@ -5415,7 +5397,7 @@
           <a:bodyPr wrap="square" lIns="0" tIns="0" rIns="0" bIns="0" rtlCol="0" anchor="ctr"/>
           <a:lstStyle/>
           <a:p>
-            <a:pPr algn="l" indent="0" marL="0">
+            <a:pPr marL="0" indent="0" algn="l">
               <a:buNone/>
             </a:pPr>
             <a:r>
@@ -5446,16 +5428,34 @@
         </p:nvGraphicFramePr>
         <p:xfrm>
           <a:off x="548640" y="1463040"/>
-          <a:ext cx="7680960" cy="914400"/>
+          <a:ext cx="7680960" cy="3886200"/>
         </p:xfrm>
         <a:graphic>
           <a:graphicData uri="http://schemas.openxmlformats.org/drawingml/2006/table">
             <a:tbl>
               <a:tblPr/>
               <a:tblGrid>
-                <a:gridCol w="3108960"/>
-                <a:gridCol w="822960"/>
-                <a:gridCol w="3749040"/>
+                <a:gridCol w="3108960">
+                  <a:extLst>
+                    <a:ext uri="{9D8B030D-6E8A-4147-A177-3AD203B41FA5}">
+                      <a16:colId xmlns:a16="http://schemas.microsoft.com/office/drawing/2014/main" val="20000"/>
+                    </a:ext>
+                  </a:extLst>
+                </a:gridCol>
+                <a:gridCol w="822960">
+                  <a:extLst>
+                    <a:ext uri="{9D8B030D-6E8A-4147-A177-3AD203B41FA5}">
+                      <a16:colId xmlns:a16="http://schemas.microsoft.com/office/drawing/2014/main" val="20001"/>
+                    </a:ext>
+                  </a:extLst>
+                </a:gridCol>
+                <a:gridCol w="3749040">
+                  <a:extLst>
+                    <a:ext uri="{9D8B030D-6E8A-4147-A177-3AD203B41FA5}">
+                      <a16:colId xmlns:a16="http://schemas.microsoft.com/office/drawing/2014/main" val="20002"/>
+                    </a:ext>
+                  </a:extLst>
+                </a:gridCol>
               </a:tblGrid>
               <a:tr h="777240">
                 <a:tc>
@@ -5463,7 +5463,7 @@
                     <a:bodyPr/>
                     <a:lstStyle/>
                     <a:p>
-                      <a:pPr indent="0" marL="0">
+                      <a:pPr marL="0" indent="0">
                         <a:buNone/>
                       </a:pPr>
                       <a:r>
@@ -5477,7 +5477,7 @@
                       <a:endParaRPr lang="en-US" sz="1400" dirty="0"/>
                     </a:p>
                   </a:txBody>
-                  <a:tcPr marL="91440" marR="91440" marT="0" marB="0" anchor="ctr">
+                  <a:tcPr marT="0" marB="0" anchor="ctr">
                     <a:lnL w="6350" cap="flat" cmpd="sng" algn="ctr">
                       <a:solidFill>
                         <a:srgbClr val="D1D5DB"/>
@@ -5524,7 +5524,7 @@
                     <a:bodyPr/>
                     <a:lstStyle/>
                     <a:p>
-                      <a:pPr indent="0" marL="0">
+                      <a:pPr marL="0" indent="0">
                         <a:buNone/>
                       </a:pPr>
                       <a:r>
@@ -5538,7 +5538,7 @@
                       <a:endParaRPr lang="en-US" sz="1400" dirty="0"/>
                     </a:p>
                   </a:txBody>
-                  <a:tcPr marL="91440" marR="91440" marT="0" marB="0" anchor="ctr">
+                  <a:tcPr marT="0" marB="0" anchor="ctr">
                     <a:lnL w="6350" cap="flat" cmpd="sng" algn="ctr">
                       <a:solidFill>
                         <a:srgbClr val="D1D5DB"/>
@@ -5585,7 +5585,7 @@
                     <a:bodyPr/>
                     <a:lstStyle/>
                     <a:p>
-                      <a:pPr indent="0" marL="0">
+                      <a:pPr marL="0" indent="0">
                         <a:buNone/>
                       </a:pPr>
                       <a:r>
@@ -5599,7 +5599,7 @@
                       <a:endParaRPr lang="en-US" sz="1400" dirty="0"/>
                     </a:p>
                   </a:txBody>
-                  <a:tcPr marL="91440" marR="91440" marT="0" marB="0" anchor="ctr">
+                  <a:tcPr marT="0" marB="0" anchor="ctr">
                     <a:lnL w="6350" cap="flat" cmpd="sng" algn="ctr">
                       <a:solidFill>
                         <a:srgbClr val="D1D5DB"/>
@@ -5641,6 +5641,11 @@
                     </a:solidFill>
                   </a:tcPr>
                 </a:tc>
+                <a:extLst>
+                  <a:ext uri="{0D108BD9-81ED-4DB2-BD59-A6C34878D82A}">
+                    <a16:rowId xmlns:a16="http://schemas.microsoft.com/office/drawing/2014/main" val="10000"/>
+                  </a:ext>
+                </a:extLst>
               </a:tr>
               <a:tr h="777240">
                 <a:tc>
@@ -5648,7 +5653,7 @@
                     <a:bodyPr/>
                     <a:lstStyle/>
                     <a:p>
-                      <a:pPr indent="0" marL="0">
+                      <a:pPr marL="0" indent="0">
                         <a:buNone/>
                       </a:pPr>
                       <a:r>
@@ -5662,7 +5667,7 @@
                       <a:endParaRPr lang="en-US" sz="1400" dirty="0"/>
                     </a:p>
                   </a:txBody>
-                  <a:tcPr marL="91440" marR="91440" marT="0" marB="0" anchor="ctr">
+                  <a:tcPr marT="0" marB="0" anchor="ctr">
                     <a:lnL w="6350" cap="flat" cmpd="sng" algn="ctr">
                       <a:solidFill>
                         <a:srgbClr val="D1D5DB"/>
@@ -5706,7 +5711,7 @@
                     <a:bodyPr/>
                     <a:lstStyle/>
                     <a:p>
-                      <a:pPr indent="0" marL="0">
+                      <a:pPr marL="0" indent="0">
                         <a:buNone/>
                       </a:pPr>
                       <a:r>
@@ -5720,7 +5725,7 @@
                       <a:endParaRPr lang="en-US" sz="1400" dirty="0"/>
                     </a:p>
                   </a:txBody>
-                  <a:tcPr marL="91440" marR="91440" marT="0" marB="0" anchor="ctr">
+                  <a:tcPr marT="0" marB="0" anchor="ctr">
                     <a:lnL w="6350" cap="flat" cmpd="sng" algn="ctr">
                       <a:solidFill>
                         <a:srgbClr val="D1D5DB"/>
@@ -5764,7 +5769,7 @@
                     <a:bodyPr/>
                     <a:lstStyle/>
                     <a:p>
-                      <a:pPr indent="0" marL="0">
+                      <a:pPr marL="0" indent="0">
                         <a:buNone/>
                       </a:pPr>
                       <a:r>
@@ -5778,7 +5783,7 @@
                       <a:endParaRPr lang="en-US" sz="1400" dirty="0"/>
                     </a:p>
                   </a:txBody>
-                  <a:tcPr marL="91440" marR="91440" marT="0" marB="0" anchor="ctr">
+                  <a:tcPr marT="0" marB="0" anchor="ctr">
                     <a:lnL w="6350" cap="flat" cmpd="sng" algn="ctr">
                       <a:solidFill>
                         <a:srgbClr val="D1D5DB"/>
@@ -5817,6 +5822,11 @@
                     </a:lnB>
                   </a:tcPr>
                 </a:tc>
+                <a:extLst>
+                  <a:ext uri="{0D108BD9-81ED-4DB2-BD59-A6C34878D82A}">
+                    <a16:rowId xmlns:a16="http://schemas.microsoft.com/office/drawing/2014/main" val="10001"/>
+                  </a:ext>
+                </a:extLst>
               </a:tr>
               <a:tr h="777240">
                 <a:tc>
@@ -5824,7 +5834,7 @@
                     <a:bodyPr/>
                     <a:lstStyle/>
                     <a:p>
-                      <a:pPr indent="0" marL="0">
+                      <a:pPr marL="0" indent="0">
                         <a:buNone/>
                       </a:pPr>
                       <a:r>
@@ -5838,7 +5848,7 @@
                       <a:endParaRPr lang="en-US" sz="1400" dirty="0"/>
                     </a:p>
                   </a:txBody>
-                  <a:tcPr marL="91440" marR="91440" marT="0" marB="0" anchor="ctr">
+                  <a:tcPr marT="0" marB="0" anchor="ctr">
                     <a:lnL w="6350" cap="flat" cmpd="sng" algn="ctr">
                       <a:solidFill>
                         <a:srgbClr val="D1D5DB"/>
@@ -5882,7 +5892,7 @@
                     <a:bodyPr/>
                     <a:lstStyle/>
                     <a:p>
-                      <a:pPr indent="0" marL="0">
+                      <a:pPr marL="0" indent="0">
                         <a:buNone/>
                       </a:pPr>
                       <a:r>
@@ -5896,7 +5906,7 @@
                       <a:endParaRPr lang="en-US" sz="1400" dirty="0"/>
                     </a:p>
                   </a:txBody>
-                  <a:tcPr marL="91440" marR="91440" marT="0" marB="0" anchor="ctr">
+                  <a:tcPr marT="0" marB="0" anchor="ctr">
                     <a:lnL w="6350" cap="flat" cmpd="sng" algn="ctr">
                       <a:solidFill>
                         <a:srgbClr val="D1D5DB"/>
@@ -5940,7 +5950,7 @@
                     <a:bodyPr/>
                     <a:lstStyle/>
                     <a:p>
-                      <a:pPr indent="0" marL="0">
+                      <a:pPr marL="0" indent="0">
                         <a:buNone/>
                       </a:pPr>
                       <a:r>
@@ -5954,7 +5964,7 @@
                       <a:endParaRPr lang="en-US" sz="1400" dirty="0"/>
                     </a:p>
                   </a:txBody>
-                  <a:tcPr marL="91440" marR="91440" marT="0" marB="0" anchor="ctr">
+                  <a:tcPr marT="0" marB="0" anchor="ctr">
                     <a:lnL w="6350" cap="flat" cmpd="sng" algn="ctr">
                       <a:solidFill>
                         <a:srgbClr val="D1D5DB"/>
@@ -5993,6 +6003,11 @@
                     </a:lnB>
                   </a:tcPr>
                 </a:tc>
+                <a:extLst>
+                  <a:ext uri="{0D108BD9-81ED-4DB2-BD59-A6C34878D82A}">
+                    <a16:rowId xmlns:a16="http://schemas.microsoft.com/office/drawing/2014/main" val="10002"/>
+                  </a:ext>
+                </a:extLst>
               </a:tr>
               <a:tr h="777240">
                 <a:tc>
@@ -6000,7 +6015,7 @@
                     <a:bodyPr/>
                     <a:lstStyle/>
                     <a:p>
-                      <a:pPr indent="0" marL="0">
+                      <a:pPr marL="0" indent="0">
                         <a:buNone/>
                       </a:pPr>
                       <a:r>
@@ -6014,7 +6029,7 @@
                       <a:endParaRPr lang="en-US" sz="1400" dirty="0"/>
                     </a:p>
                   </a:txBody>
-                  <a:tcPr marL="91440" marR="91440" marT="0" marB="0" anchor="ctr">
+                  <a:tcPr marT="0" marB="0" anchor="ctr">
                     <a:lnL w="6350" cap="flat" cmpd="sng" algn="ctr">
                       <a:solidFill>
                         <a:srgbClr val="D1D5DB"/>
@@ -6058,7 +6073,7 @@
                     <a:bodyPr/>
                     <a:lstStyle/>
                     <a:p>
-                      <a:pPr indent="0" marL="0">
+                      <a:pPr marL="0" indent="0">
                         <a:buNone/>
                       </a:pPr>
                       <a:r>
@@ -6072,7 +6087,7 @@
                       <a:endParaRPr lang="en-US" sz="1400" dirty="0"/>
                     </a:p>
                   </a:txBody>
-                  <a:tcPr marL="91440" marR="91440" marT="0" marB="0" anchor="ctr">
+                  <a:tcPr marT="0" marB="0" anchor="ctr">
                     <a:lnL w="6350" cap="flat" cmpd="sng" algn="ctr">
                       <a:solidFill>
                         <a:srgbClr val="D1D5DB"/>
@@ -6116,7 +6131,7 @@
                     <a:bodyPr/>
                     <a:lstStyle/>
                     <a:p>
-                      <a:pPr indent="0" marL="0">
+                      <a:pPr marL="0" indent="0">
                         <a:buNone/>
                       </a:pPr>
                       <a:r>
@@ -6130,7 +6145,7 @@
                       <a:endParaRPr lang="en-US" sz="1400" dirty="0"/>
                     </a:p>
                   </a:txBody>
-                  <a:tcPr marL="91440" marR="91440" marT="0" marB="0" anchor="ctr">
+                  <a:tcPr marT="0" marB="0" anchor="ctr">
                     <a:lnL w="6350" cap="flat" cmpd="sng" algn="ctr">
                       <a:solidFill>
                         <a:srgbClr val="D1D5DB"/>
@@ -6169,6 +6184,11 @@
                     </a:lnB>
                   </a:tcPr>
                 </a:tc>
+                <a:extLst>
+                  <a:ext uri="{0D108BD9-81ED-4DB2-BD59-A6C34878D82A}">
+                    <a16:rowId xmlns:a16="http://schemas.microsoft.com/office/drawing/2014/main" val="10003"/>
+                  </a:ext>
+                </a:extLst>
               </a:tr>
               <a:tr h="777240">
                 <a:tc>
@@ -6176,7 +6196,7 @@
                     <a:bodyPr/>
                     <a:lstStyle/>
                     <a:p>
-                      <a:pPr indent="0" marL="0">
+                      <a:pPr marL="0" indent="0">
                         <a:buNone/>
                       </a:pPr>
                       <a:r>
@@ -6190,7 +6210,7 @@
                       <a:endParaRPr lang="en-US" sz="1400" dirty="0"/>
                     </a:p>
                   </a:txBody>
-                  <a:tcPr marL="91440" marR="91440" marT="0" marB="0" anchor="ctr">
+                  <a:tcPr marT="0" marB="0" anchor="ctr">
                     <a:lnL w="6350" cap="flat" cmpd="sng" algn="ctr">
                       <a:solidFill>
                         <a:srgbClr val="D1D5DB"/>
@@ -6234,7 +6254,7 @@
                     <a:bodyPr/>
                     <a:lstStyle/>
                     <a:p>
-                      <a:pPr indent="0" marL="0">
+                      <a:pPr marL="0" indent="0">
                         <a:buNone/>
                       </a:pPr>
                       <a:r>
@@ -6248,7 +6268,7 @@
                       <a:endParaRPr lang="en-US" sz="1400" dirty="0"/>
                     </a:p>
                   </a:txBody>
-                  <a:tcPr marL="91440" marR="91440" marT="0" marB="0" anchor="ctr">
+                  <a:tcPr marT="0" marB="0" anchor="ctr">
                     <a:lnL w="6350" cap="flat" cmpd="sng" algn="ctr">
                       <a:solidFill>
                         <a:srgbClr val="D1D5DB"/>
@@ -6292,7 +6312,7 @@
                     <a:bodyPr/>
                     <a:lstStyle/>
                     <a:p>
-                      <a:pPr indent="0" marL="0">
+                      <a:pPr marL="0" indent="0">
                         <a:buNone/>
                       </a:pPr>
                       <a:r>
@@ -6306,7 +6326,7 @@
                       <a:endParaRPr lang="en-US" sz="1400" dirty="0"/>
                     </a:p>
                   </a:txBody>
-                  <a:tcPr marL="91440" marR="91440" marT="0" marB="0" anchor="ctr">
+                  <a:tcPr marT="0" marB="0" anchor="ctr">
                     <a:lnL w="6350" cap="flat" cmpd="sng" algn="ctr">
                       <a:solidFill>
                         <a:srgbClr val="D1D5DB"/>
@@ -6345,6 +6365,11 @@
                     </a:lnB>
                   </a:tcPr>
                 </a:tc>
+                <a:extLst>
+                  <a:ext uri="{0D108BD9-81ED-4DB2-BD59-A6C34878D82A}">
+                    <a16:rowId xmlns:a16="http://schemas.microsoft.com/office/drawing/2014/main" val="10004"/>
+                  </a:ext>
+                </a:extLst>
               </a:tr>
             </a:tbl>
           </a:graphicData>
@@ -6393,7 +6418,7 @@
           <a:bodyPr wrap="square" lIns="0" tIns="0" rIns="0" bIns="0" rtlCol="0" anchor="t"/>
           <a:lstStyle/>
           <a:p>
-            <a:pPr algn="ctr" indent="0" marL="0">
+            <a:pPr marL="0" indent="0" algn="ctr">
               <a:buNone/>
             </a:pPr>
             <a:r>
@@ -6429,7 +6454,7 @@
           <a:bodyPr wrap="square" lIns="0" tIns="0" rIns="0" bIns="0" rtlCol="0" anchor="t"/>
           <a:lstStyle/>
           <a:p>
-            <a:pPr algn="ctr" indent="0" marL="0">
+            <a:pPr marL="0" indent="0" algn="ctr">
               <a:buNone/>
             </a:pPr>
             <a:r>
@@ -6487,7 +6512,7 @@
           <a:bodyPr wrap="square" lIns="0" tIns="0" rIns="0" bIns="0" rtlCol="0" anchor="ctr"/>
           <a:lstStyle/>
           <a:p>
-            <a:pPr indent="0" marL="0">
+            <a:pPr marL="0" indent="0">
               <a:buNone/>
             </a:pPr>
             <a:r>
@@ -6522,7 +6547,7 @@
           </a:prstGeom>
           <a:extLst>
             <a:ext uri="{C572A759-6A51-4108-AA02-DFA0A04FC94B}">
-              <ma14:wrappingTextBoxFlag xmlns:ma14="http://schemas.microsoft.com/office/mac/drawingml/2011/main" val="0"/>
+              <ma14:wrappingTextBoxFlag xmlns:ma14="http://schemas.microsoft.com/office/mac/drawingml/2011/main" xmlns="" val="0"/>
             </a:ext>
           </a:extLst>
         </p:spPr>
@@ -6540,7 +6565,7 @@
           <a:p>
             <a:pPr algn="l"/>
             <a:fld id="{F7021451-1387-4CA6-816F-3879F97B5CBC}" type="slidenum">
-              <a:rPr b="0" lang="en-US"/>
+              <a:rPr lang="en-US" b="0"/>
               <a:t>13</a:t>
             </a:fld>
             <a:endParaRPr lang="en-US"/>
@@ -6575,9 +6600,11 @@
       <p:sp>
         <p:nvSpPr>
           <p:cNvPr id="2" name="Text 0"/>
-          <p:cNvSpPr/>
+          <p:cNvSpPr>
+            <a:spLocks noGrp="1"/>
+          </p:cNvSpPr>
           <p:nvPr>
-            <p:ph idx="100" type="title" hasCustomPrompt="1"/>
+            <p:ph type="title" idx="100" hasCustomPrompt="1"/>
           </p:nvPr>
         </p:nvSpPr>
         <p:spPr>
@@ -6595,7 +6622,7 @@
           <a:bodyPr wrap="square" lIns="0" tIns="0" rIns="0" bIns="0" rtlCol="0" anchor="ctr"/>
           <a:lstStyle/>
           <a:p>
-            <a:pPr algn="l" indent="0" marL="0">
+            <a:pPr marL="0" indent="0" algn="l">
               <a:buNone/>
             </a:pPr>
             <a:r>
@@ -6651,7 +6678,7 @@
           <a:bodyPr wrap="square" lIns="0" tIns="0" rIns="0" bIns="0" rtlCol="0" anchor="ctr"/>
           <a:lstStyle/>
           <a:p>
-            <a:pPr algn="ctr" indent="0" marL="0">
+            <a:pPr marL="0" indent="0" algn="ctr">
               <a:buNone/>
             </a:pPr>
             <a:r>
@@ -6687,7 +6714,7 @@
           <a:bodyPr wrap="square" lIns="0" tIns="0" rIns="0" bIns="0" rtlCol="0" anchor="ctr"/>
           <a:lstStyle/>
           <a:p>
-            <a:pPr indent="0" marL="0">
+            <a:pPr marL="0" indent="0">
               <a:buNone/>
             </a:pPr>
             <a:r>
@@ -6743,7 +6770,7 @@
           <a:bodyPr wrap="square" lIns="0" tIns="0" rIns="0" bIns="0" rtlCol="0" anchor="ctr"/>
           <a:lstStyle/>
           <a:p>
-            <a:pPr algn="ctr" indent="0" marL="0">
+            <a:pPr marL="0" indent="0" algn="ctr">
               <a:buNone/>
             </a:pPr>
             <a:r>
@@ -6779,7 +6806,7 @@
           <a:bodyPr wrap="square" lIns="0" tIns="0" rIns="0" bIns="0" rtlCol="0" anchor="ctr"/>
           <a:lstStyle/>
           <a:p>
-            <a:pPr indent="0" marL="0">
+            <a:pPr marL="0" indent="0">
               <a:buNone/>
             </a:pPr>
             <a:r>
@@ -6835,7 +6862,7 @@
           <a:bodyPr wrap="square" lIns="0" tIns="0" rIns="0" bIns="0" rtlCol="0" anchor="ctr"/>
           <a:lstStyle/>
           <a:p>
-            <a:pPr algn="ctr" indent="0" marL="0">
+            <a:pPr marL="0" indent="0" algn="ctr">
               <a:buNone/>
             </a:pPr>
             <a:r>
@@ -6871,7 +6898,7 @@
           <a:bodyPr wrap="square" lIns="0" tIns="0" rIns="0" bIns="0" rtlCol="0" anchor="ctr"/>
           <a:lstStyle/>
           <a:p>
-            <a:pPr indent="0" marL="0">
+            <a:pPr marL="0" indent="0">
               <a:buNone/>
             </a:pPr>
             <a:r>
@@ -6927,7 +6954,7 @@
           <a:bodyPr wrap="square" lIns="0" tIns="0" rIns="0" bIns="0" rtlCol="0" anchor="ctr"/>
           <a:lstStyle/>
           <a:p>
-            <a:pPr algn="ctr" indent="0" marL="0">
+            <a:pPr marL="0" indent="0" algn="ctr">
               <a:buNone/>
             </a:pPr>
             <a:r>
@@ -6963,7 +6990,7 @@
           <a:bodyPr wrap="square" lIns="0" tIns="0" rIns="0" bIns="0" rtlCol="0" anchor="ctr"/>
           <a:lstStyle/>
           <a:p>
-            <a:pPr indent="0" marL="0">
+            <a:pPr marL="0" indent="0">
               <a:buNone/>
             </a:pPr>
             <a:r>
@@ -7021,7 +7048,7 @@
           <a:bodyPr wrap="square" lIns="0" tIns="0" rIns="0" bIns="0" rtlCol="0" anchor="t"/>
           <a:lstStyle/>
           <a:p>
-            <a:pPr indent="0" marL="0">
+            <a:pPr marL="0" indent="0">
               <a:buNone/>
             </a:pPr>
             <a:r>
@@ -7168,7 +7195,7 @@
           </a:prstGeom>
           <a:extLst>
             <a:ext uri="{C572A759-6A51-4108-AA02-DFA0A04FC94B}">
-              <ma14:wrappingTextBoxFlag xmlns:ma14="http://schemas.microsoft.com/office/mac/drawingml/2011/main" val="0"/>
+              <ma14:wrappingTextBoxFlag xmlns:ma14="http://schemas.microsoft.com/office/mac/drawingml/2011/main" xmlns="" val="0"/>
             </a:ext>
           </a:extLst>
         </p:spPr>
@@ -7186,7 +7213,7 @@
           <a:p>
             <a:pPr algn="l"/>
             <a:fld id="{F7021451-1387-4CA6-816F-3879F97B5CBC}" type="slidenum">
-              <a:rPr b="0" lang="en-US"/>
+              <a:rPr lang="en-US" b="0"/>
               <a:t>14</a:t>
             </a:fld>
             <a:endParaRPr lang="en-US"/>
@@ -7221,9 +7248,11 @@
       <p:sp>
         <p:nvSpPr>
           <p:cNvPr id="2" name="Text 0"/>
-          <p:cNvSpPr/>
+          <p:cNvSpPr>
+            <a:spLocks noGrp="1"/>
+          </p:cNvSpPr>
           <p:nvPr>
-            <p:ph idx="100" type="title" hasCustomPrompt="1"/>
+            <p:ph type="title" idx="100" hasCustomPrompt="1"/>
           </p:nvPr>
         </p:nvSpPr>
         <p:spPr>
@@ -7241,7 +7270,7 @@
           <a:bodyPr wrap="square" lIns="0" tIns="0" rIns="0" bIns="0" rtlCol="0" anchor="b"/>
           <a:lstStyle/>
           <a:p>
-            <a:pPr algn="l" indent="0" marL="0">
+            <a:pPr marL="0" indent="0" algn="l">
               <a:buNone/>
             </a:pPr>
             <a:r>
@@ -7277,17 +7306,9 @@
           <a:bodyPr wrap="square" lIns="0" tIns="0" rIns="0" bIns="0" rtlCol="0" anchor="t"/>
           <a:lstStyle/>
           <a:p>
-            <a:pPr indent="0" marL="0">
-              <a:buNone/>
-            </a:pPr>
-            <a:r>
-              <a:rPr lang="en-US" sz="2800" b="1" dirty="0">
-                <a:solidFill>
-                  <a:schemeClr val="accent1"/>
-                </a:solidFill>
-              </a:rPr>
-              <a:t>Questions?</a:t>
-            </a:r>
+            <a:pPr marL="0" indent="0">
+              <a:buNone/>
+            </a:pPr>
             <a:endParaRPr lang="en-US" sz="2800" dirty="0"/>
           </a:p>
         </p:txBody>
@@ -7313,18 +7334,19 @@
           <a:bodyPr wrap="square" lIns="0" tIns="0" rIns="0" bIns="0" rtlCol="0" anchor="t"/>
           <a:lstStyle/>
           <a:p>
-            <a:pPr indent="0" marL="0">
-              <a:buNone/>
-            </a:pPr>
-            <a:r>
-              <a:rPr lang="en-US" sz="1800" dirty="0">
-                <a:solidFill>
-                  <a:schemeClr val="bg1"/>
-                </a:solidFill>
-              </a:rPr>
-              <a:t>github.com/&lt;your-username&gt;/fitpro</a:t>
-            </a:r>
-            <a:endParaRPr lang="en-US" sz="1800" dirty="0"/>
+            <a:r>
+              <a:rPr lang="en-US" dirty="0">
+                <a:solidFill>
+                  <a:srgbClr val="FF5A00"/>
+                </a:solidFill>
+              </a:rPr>
+              <a:t>https://github.com/adiithakurr110/FitPro-Fitness-Platform</a:t>
+            </a:r>
+            <a:endParaRPr lang="en-US" sz="1800" dirty="0">
+              <a:solidFill>
+                <a:srgbClr val="FF5A00"/>
+              </a:solidFill>
+            </a:endParaRPr>
           </a:p>
         </p:txBody>
       </p:sp>
@@ -7350,14 +7372,14 @@
       </p:sp>
       <p:pic>
         <p:nvPicPr>
-          <p:cNvPr id="6" name="hero-icon" descr="preencoded.png">    </p:cNvPr>
+          <p:cNvPr id="6" name="hero-icon" descr="preencoded.png"/>
           <p:cNvPicPr>
             <a:picLocks noChangeAspect="1"/>
           </p:cNvPicPr>
           <p:nvPr/>
         </p:nvPicPr>
         <p:blipFill>
-          <a:blip r:embed="rId1"/>
+          <a:blip r:embed="rId3"/>
           <a:stretch>
             <a:fillRect/>
           </a:stretch>
@@ -7400,9 +7422,11 @@
       <p:sp>
         <p:nvSpPr>
           <p:cNvPr id="2" name="Text 0"/>
-          <p:cNvSpPr/>
+          <p:cNvSpPr>
+            <a:spLocks noGrp="1"/>
+          </p:cNvSpPr>
           <p:nvPr>
-            <p:ph idx="100" type="title" hasCustomPrompt="1"/>
+            <p:ph type="title" idx="100" hasCustomPrompt="1"/>
           </p:nvPr>
         </p:nvSpPr>
         <p:spPr>
@@ -7420,7 +7444,7 @@
           <a:bodyPr wrap="square" lIns="0" tIns="0" rIns="0" bIns="0" rtlCol="0" anchor="ctr"/>
           <a:lstStyle/>
           <a:p>
-            <a:pPr algn="l" indent="0" marL="0">
+            <a:pPr marL="0" indent="0" algn="l">
               <a:buNone/>
             </a:pPr>
             <a:r>
@@ -7479,14 +7503,14 @@
       </p:sp>
       <p:pic>
         <p:nvPicPr>
-          <p:cNvPr id="6" name="icon" descr="preencoded.png">    </p:cNvPr>
+          <p:cNvPr id="6" name="icon" descr="preencoded.png"/>
           <p:cNvPicPr>
             <a:picLocks noChangeAspect="1"/>
           </p:cNvPicPr>
           <p:nvPr/>
         </p:nvPicPr>
         <p:blipFill>
-          <a:blip r:embed="rId1"/>
+          <a:blip r:embed="rId3"/>
           <a:stretch>
             <a:fillRect/>
           </a:stretch>
@@ -7522,7 +7546,7 @@
           <a:bodyPr wrap="square" lIns="0" tIns="0" rIns="0" bIns="0" rtlCol="0" anchor="t"/>
           <a:lstStyle/>
           <a:p>
-            <a:pPr indent="0" marL="0">
+            <a:pPr marL="0" indent="0">
               <a:buNone/>
             </a:pPr>
             <a:r>
@@ -7675,14 +7699,14 @@
       </p:sp>
       <p:pic>
         <p:nvPicPr>
-          <p:cNvPr id="11" name="icon" descr="preencoded.png">    </p:cNvPr>
+          <p:cNvPr id="11" name="icon" descr="preencoded.png"/>
           <p:cNvPicPr>
             <a:picLocks noChangeAspect="1"/>
           </p:cNvPicPr>
           <p:nvPr/>
         </p:nvPicPr>
         <p:blipFill>
-          <a:blip r:embed="rId2"/>
+          <a:blip r:embed="rId4"/>
           <a:stretch>
             <a:fillRect/>
           </a:stretch>
@@ -7718,7 +7742,7 @@
           <a:bodyPr wrap="square" lIns="0" tIns="0" rIns="0" bIns="0" rtlCol="0" anchor="t"/>
           <a:lstStyle/>
           <a:p>
-            <a:pPr indent="0" marL="0">
+            <a:pPr marL="0" indent="0">
               <a:buNone/>
             </a:pPr>
             <a:r>
@@ -7847,7 +7871,7 @@
           </a:prstGeom>
           <a:extLst>
             <a:ext uri="{C572A759-6A51-4108-AA02-DFA0A04FC94B}">
-              <ma14:wrappingTextBoxFlag xmlns:ma14="http://schemas.microsoft.com/office/mac/drawingml/2011/main" val="0"/>
+              <ma14:wrappingTextBoxFlag xmlns:ma14="http://schemas.microsoft.com/office/mac/drawingml/2011/main" xmlns="" val="0"/>
             </a:ext>
           </a:extLst>
         </p:spPr>
@@ -7865,7 +7889,7 @@
           <a:p>
             <a:pPr algn="l"/>
             <a:fld id="{F7021451-1387-4CA6-816F-3879F97B5CBC}" type="slidenum">
-              <a:rPr b="0" lang="en-US"/>
+              <a:rPr lang="en-US" b="0"/>
               <a:t>2</a:t>
             </a:fld>
             <a:endParaRPr lang="en-US"/>
@@ -7900,9 +7924,11 @@
       <p:sp>
         <p:nvSpPr>
           <p:cNvPr id="2" name="Text 0"/>
-          <p:cNvSpPr/>
+          <p:cNvSpPr>
+            <a:spLocks noGrp="1"/>
+          </p:cNvSpPr>
           <p:nvPr>
-            <p:ph idx="100" type="title" hasCustomPrompt="1"/>
+            <p:ph type="title" idx="100" hasCustomPrompt="1"/>
           </p:nvPr>
         </p:nvSpPr>
         <p:spPr>
@@ -7920,7 +7946,7 @@
           <a:bodyPr wrap="square" lIns="0" tIns="0" rIns="0" bIns="0" rtlCol="0" anchor="ctr"/>
           <a:lstStyle/>
           <a:p>
-            <a:pPr algn="l" indent="0" marL="0">
+            <a:pPr marL="0" indent="0" algn="l">
               <a:buNone/>
             </a:pPr>
             <a:r>
@@ -7979,14 +8005,14 @@
       </p:sp>
       <p:pic>
         <p:nvPicPr>
-          <p:cNvPr id="6" name="icon" descr="preencoded.png">    </p:cNvPr>
+          <p:cNvPr id="6" name="icon" descr="preencoded.png"/>
           <p:cNvPicPr>
             <a:picLocks noChangeAspect="1"/>
           </p:cNvPicPr>
           <p:nvPr/>
         </p:nvPicPr>
         <p:blipFill>
-          <a:blip r:embed="rId1"/>
+          <a:blip r:embed="rId3"/>
           <a:stretch>
             <a:fillRect/>
           </a:stretch>
@@ -8022,7 +8048,7 @@
           <a:bodyPr wrap="square" lIns="0" tIns="0" rIns="0" bIns="0" rtlCol="0" anchor="t"/>
           <a:lstStyle/>
           <a:p>
-            <a:pPr indent="0" marL="0">
+            <a:pPr marL="0" indent="0">
               <a:buNone/>
             </a:pPr>
             <a:r>
@@ -8193,14 +8219,14 @@
       </p:sp>
       <p:pic>
         <p:nvPicPr>
-          <p:cNvPr id="11" name="icon" descr="preencoded.png">    </p:cNvPr>
+          <p:cNvPr id="11" name="icon" descr="preencoded.png"/>
           <p:cNvPicPr>
             <a:picLocks noChangeAspect="1"/>
           </p:cNvPicPr>
           <p:nvPr/>
         </p:nvPicPr>
         <p:blipFill>
-          <a:blip r:embed="rId2"/>
+          <a:blip r:embed="rId4"/>
           <a:stretch>
             <a:fillRect/>
           </a:stretch>
@@ -8236,7 +8262,7 @@
           <a:bodyPr wrap="square" lIns="0" tIns="0" rIns="0" bIns="0" rtlCol="0" anchor="t"/>
           <a:lstStyle/>
           <a:p>
-            <a:pPr indent="0" marL="0">
+            <a:pPr marL="0" indent="0">
               <a:buNone/>
             </a:pPr>
             <a:r>
@@ -8384,7 +8410,7 @@
           <a:bodyPr wrap="square" lIns="0" tIns="0" rIns="0" bIns="0" rtlCol="0" anchor="t"/>
           <a:lstStyle/>
           <a:p>
-            <a:pPr indent="0" marL="0">
+            <a:pPr marL="0" indent="0">
               <a:buNone/>
             </a:pPr>
             <a:r>
@@ -8419,7 +8445,7 @@
           </a:prstGeom>
           <a:extLst>
             <a:ext uri="{C572A759-6A51-4108-AA02-DFA0A04FC94B}">
-              <ma14:wrappingTextBoxFlag xmlns:ma14="http://schemas.microsoft.com/office/mac/drawingml/2011/main" val="0"/>
+              <ma14:wrappingTextBoxFlag xmlns:ma14="http://schemas.microsoft.com/office/mac/drawingml/2011/main" xmlns="" val="0"/>
             </a:ext>
           </a:extLst>
         </p:spPr>
@@ -8437,7 +8463,7 @@
           <a:p>
             <a:pPr algn="l"/>
             <a:fld id="{F7021451-1387-4CA6-816F-3879F97B5CBC}" type="slidenum">
-              <a:rPr b="0" lang="en-US"/>
+              <a:rPr lang="en-US" b="0"/>
               <a:t>3</a:t>
             </a:fld>
             <a:endParaRPr lang="en-US"/>
@@ -8472,9 +8498,11 @@
       <p:sp>
         <p:nvSpPr>
           <p:cNvPr id="2" name="Text 0"/>
-          <p:cNvSpPr/>
+          <p:cNvSpPr>
+            <a:spLocks noGrp="1"/>
+          </p:cNvSpPr>
           <p:nvPr>
-            <p:ph idx="100" type="title" hasCustomPrompt="1"/>
+            <p:ph type="title" idx="100" hasCustomPrompt="1"/>
           </p:nvPr>
         </p:nvSpPr>
         <p:spPr>
@@ -8492,7 +8520,7 @@
           <a:bodyPr wrap="square" lIns="0" tIns="0" rIns="0" bIns="0" rtlCol="0" anchor="ctr"/>
           <a:lstStyle/>
           <a:p>
-            <a:pPr algn="l" indent="0" marL="0">
+            <a:pPr marL="0" indent="0" algn="l">
               <a:buNone/>
             </a:pPr>
             <a:r>
@@ -8551,283 +8579,7 @@
       </p:sp>
       <p:pic>
         <p:nvPicPr>
-          <p:cNvPr id="6" name="icon" descr="preencoded.png">    </p:cNvPr>
-          <p:cNvPicPr>
-            <a:picLocks noChangeAspect="1"/>
-          </p:cNvPicPr>
-          <p:nvPr/>
-        </p:nvPicPr>
-        <p:blipFill>
-          <a:blip r:embed="rId1"/>
-          <a:stretch>
-            <a:fillRect/>
-          </a:stretch>
-        </p:blipFill>
-        <p:spPr>
-          <a:xfrm>
-            <a:off x="821131" y="2009851"/>
-            <a:ext cx="460858" cy="460858"/>
-          </a:xfrm>
-          <a:prstGeom prst="rect">
-            <a:avLst/>
-          </a:prstGeom>
-        </p:spPr>
-      </p:pic>
-      <p:sp>
-        <p:nvSpPr>
-          <p:cNvPr id="7" name="Text 3"/>
-          <p:cNvSpPr txBox="1"/>
-          <p:nvPr/>
-        </p:nvSpPr>
-        <p:spPr>
-          <a:xfrm>
-            <a:off x="640080" y="2880360"/>
-            <a:ext cx="1737360" cy="411480"/>
-          </a:xfrm>
-          <a:prstGeom prst="rect">
-            <a:avLst/>
-          </a:prstGeom>
-          <a:noFill/>
-          <a:ln/>
-        </p:spPr>
-        <p:txBody>
-          <a:bodyPr wrap="square" lIns="0" tIns="0" rIns="0" bIns="0" rtlCol="0" anchor="t"/>
-          <a:lstStyle/>
-          <a:p>
-            <a:pPr indent="0" marL="0">
-              <a:buNone/>
-            </a:pPr>
-            <a:r>
-              <a:rPr lang="en-US" sz="2000" b="1" dirty="0">
-                <a:solidFill>
-                  <a:schemeClr val="tx1"/>
-                </a:solidFill>
-              </a:rPr>
-              <a:t>Frontend</a:t>
-            </a:r>
-            <a:endParaRPr lang="en-US" sz="2000" dirty="0"/>
-          </a:p>
-        </p:txBody>
-      </p:sp>
-      <p:sp>
-        <p:nvSpPr>
-          <p:cNvPr id="8" name="Text 4"/>
-          <p:cNvSpPr txBox="1"/>
-          <p:nvPr/>
-        </p:nvSpPr>
-        <p:spPr>
-          <a:xfrm>
-            <a:off x="640080" y="3383280"/>
-            <a:ext cx="1737360" cy="1371600"/>
-          </a:xfrm>
-          <a:prstGeom prst="rect">
-            <a:avLst/>
-          </a:prstGeom>
-          <a:noFill/>
-          <a:ln/>
-        </p:spPr>
-        <p:txBody>
-          <a:bodyPr wrap="square" lIns="0" tIns="0" rIns="0" bIns="0" rtlCol="0" anchor="t"/>
-          <a:lstStyle/>
-          <a:p>
-            <a:pPr indent="0" marL="0">
-              <a:buNone/>
-            </a:pPr>
-            <a:r>
-              <a:rPr lang="en-US" sz="1400" dirty="0">
-                <a:solidFill>
-                  <a:schemeClr val="tx1"/>
-                </a:solidFill>
-              </a:rPr>
-              <a:t>JSP, JSTL, HTML5, CSS3, vanilla JavaScript</a:t>
-            </a:r>
-            <a:endParaRPr lang="en-US" sz="1400" dirty="0"/>
-          </a:p>
-        </p:txBody>
-      </p:sp>
-      <p:sp>
-        <p:nvSpPr>
-          <p:cNvPr id="9" name="tech-tile"/>
-          <p:cNvSpPr/>
-          <p:nvPr/>
-        </p:nvSpPr>
-        <p:spPr>
-          <a:xfrm>
-            <a:off x="2743200" y="1554480"/>
-            <a:ext cx="2103120" cy="3383280"/>
-          </a:xfrm>
-          <a:prstGeom prst="roundRect">
-            <a:avLst>
-              <a:gd name="adj" fmla="val 5217"/>
-            </a:avLst>
-          </a:prstGeom>
-          <a:solidFill>
-            <a:schemeClr val="bg2"/>
-          </a:solidFill>
-          <a:ln/>
-        </p:spPr>
-      </p:sp>
-      <p:sp>
-        <p:nvSpPr>
-          <p:cNvPr id="10" name="icon-circle"/>
-          <p:cNvSpPr/>
-          <p:nvPr/>
-        </p:nvSpPr>
-        <p:spPr>
-          <a:xfrm>
-            <a:off x="2926080" y="1828800"/>
-            <a:ext cx="822960" cy="822960"/>
-          </a:xfrm>
-          <a:prstGeom prst="ellipse">
-            <a:avLst/>
-          </a:prstGeom>
-          <a:solidFill>
-            <a:schemeClr val="accent2"/>
-          </a:solidFill>
-          <a:ln/>
-        </p:spPr>
-      </p:sp>
-      <p:pic>
-        <p:nvPicPr>
-          <p:cNvPr id="11" name="icon" descr="preencoded.png">    </p:cNvPr>
-          <p:cNvPicPr>
-            <a:picLocks noChangeAspect="1"/>
-          </p:cNvPicPr>
-          <p:nvPr/>
-        </p:nvPicPr>
-        <p:blipFill>
-          <a:blip r:embed="rId2"/>
-          <a:stretch>
-            <a:fillRect/>
-          </a:stretch>
-        </p:blipFill>
-        <p:spPr>
-          <a:xfrm>
-            <a:off x="3107131" y="2009851"/>
-            <a:ext cx="460858" cy="460858"/>
-          </a:xfrm>
-          <a:prstGeom prst="rect">
-            <a:avLst/>
-          </a:prstGeom>
-        </p:spPr>
-      </p:pic>
-      <p:sp>
-        <p:nvSpPr>
-          <p:cNvPr id="12" name="Text 7"/>
-          <p:cNvSpPr txBox="1"/>
-          <p:nvPr/>
-        </p:nvSpPr>
-        <p:spPr>
-          <a:xfrm>
-            <a:off x="2926080" y="2880360"/>
-            <a:ext cx="1737360" cy="411480"/>
-          </a:xfrm>
-          <a:prstGeom prst="rect">
-            <a:avLst/>
-          </a:prstGeom>
-          <a:noFill/>
-          <a:ln/>
-        </p:spPr>
-        <p:txBody>
-          <a:bodyPr wrap="square" lIns="0" tIns="0" rIns="0" bIns="0" rtlCol="0" anchor="t"/>
-          <a:lstStyle/>
-          <a:p>
-            <a:pPr indent="0" marL="0">
-              <a:buNone/>
-            </a:pPr>
-            <a:r>
-              <a:rPr lang="en-US" sz="2000" b="1" dirty="0">
-                <a:solidFill>
-                  <a:schemeClr val="tx1"/>
-                </a:solidFill>
-              </a:rPr>
-              <a:t>Backend</a:t>
-            </a:r>
-            <a:endParaRPr lang="en-US" sz="2000" dirty="0"/>
-          </a:p>
-        </p:txBody>
-      </p:sp>
-      <p:sp>
-        <p:nvSpPr>
-          <p:cNvPr id="13" name="Text 8"/>
-          <p:cNvSpPr txBox="1"/>
-          <p:nvPr/>
-        </p:nvSpPr>
-        <p:spPr>
-          <a:xfrm>
-            <a:off x="2926080" y="3383280"/>
-            <a:ext cx="1737360" cy="1371600"/>
-          </a:xfrm>
-          <a:prstGeom prst="rect">
-            <a:avLst/>
-          </a:prstGeom>
-          <a:noFill/>
-          <a:ln/>
-        </p:spPr>
-        <p:txBody>
-          <a:bodyPr wrap="square" lIns="0" tIns="0" rIns="0" bIns="0" rtlCol="0" anchor="t"/>
-          <a:lstStyle/>
-          <a:p>
-            <a:pPr indent="0" marL="0">
-              <a:buNone/>
-            </a:pPr>
-            <a:r>
-              <a:rPr lang="en-US" sz="1400" dirty="0">
-                <a:solidFill>
-                  <a:schemeClr val="tx1"/>
-                </a:solidFill>
-              </a:rPr>
-              <a:t>Java 11, Servlets 4.0, Filters, Listeners</a:t>
-            </a:r>
-            <a:endParaRPr lang="en-US" sz="1400" dirty="0"/>
-          </a:p>
-        </p:txBody>
-      </p:sp>
-      <p:sp>
-        <p:nvSpPr>
-          <p:cNvPr id="14" name="tech-tile"/>
-          <p:cNvSpPr/>
-          <p:nvPr/>
-        </p:nvSpPr>
-        <p:spPr>
-          <a:xfrm>
-            <a:off x="5029200" y="1554480"/>
-            <a:ext cx="2103120" cy="3383280"/>
-          </a:xfrm>
-          <a:prstGeom prst="roundRect">
-            <a:avLst>
-              <a:gd name="adj" fmla="val 5217"/>
-            </a:avLst>
-          </a:prstGeom>
-          <a:solidFill>
-            <a:schemeClr val="bg2"/>
-          </a:solidFill>
-          <a:ln/>
-        </p:spPr>
-      </p:sp>
-      <p:sp>
-        <p:nvSpPr>
-          <p:cNvPr id="15" name="icon-circle"/>
-          <p:cNvSpPr/>
-          <p:nvPr/>
-        </p:nvSpPr>
-        <p:spPr>
-          <a:xfrm>
-            <a:off x="5212080" y="1828800"/>
-            <a:ext cx="822960" cy="822960"/>
-          </a:xfrm>
-          <a:prstGeom prst="ellipse">
-            <a:avLst/>
-          </a:prstGeom>
-          <a:solidFill>
-            <a:schemeClr val="accent1"/>
-          </a:solidFill>
-          <a:ln/>
-        </p:spPr>
-      </p:sp>
-      <p:pic>
-        <p:nvPicPr>
-          <p:cNvPr id="16" name="icon" descr="preencoded.png">    </p:cNvPr>
+          <p:cNvPr id="6" name="icon" descr="preencoded.png"/>
           <p:cNvPicPr>
             <a:picLocks noChangeAspect="1"/>
           </p:cNvPicPr>
@@ -8841,7 +8593,7 @@
         </p:blipFill>
         <p:spPr>
           <a:xfrm>
-            <a:off x="5393131" y="2009851"/>
+            <a:off x="821131" y="2009851"/>
             <a:ext cx="460858" cy="460858"/>
           </a:xfrm>
           <a:prstGeom prst="rect">
@@ -8851,13 +8603,13 @@
       </p:pic>
       <p:sp>
         <p:nvSpPr>
-          <p:cNvPr id="17" name="Text 11"/>
+          <p:cNvPr id="7" name="Text 3"/>
           <p:cNvSpPr txBox="1"/>
           <p:nvPr/>
         </p:nvSpPr>
         <p:spPr>
           <a:xfrm>
-            <a:off x="5212080" y="2880360"/>
+            <a:off x="640080" y="2880360"/>
             <a:ext cx="1737360" cy="411480"/>
           </a:xfrm>
           <a:prstGeom prst="rect">
@@ -8870,7 +8622,7 @@
           <a:bodyPr wrap="square" lIns="0" tIns="0" rIns="0" bIns="0" rtlCol="0" anchor="t"/>
           <a:lstStyle/>
           <a:p>
-            <a:pPr indent="0" marL="0">
+            <a:pPr marL="0" indent="0">
               <a:buNone/>
             </a:pPr>
             <a:r>
@@ -8879,7 +8631,7 @@
                   <a:schemeClr val="tx1"/>
                 </a:solidFill>
               </a:rPr>
-              <a:t>Database</a:t>
+              <a:t>Frontend</a:t>
             </a:r>
             <a:endParaRPr lang="en-US" sz="2000" dirty="0"/>
           </a:p>
@@ -8887,13 +8639,13 @@
       </p:sp>
       <p:sp>
         <p:nvSpPr>
-          <p:cNvPr id="18" name="Text 12"/>
+          <p:cNvPr id="8" name="Text 4"/>
           <p:cNvSpPr txBox="1"/>
           <p:nvPr/>
         </p:nvSpPr>
         <p:spPr>
           <a:xfrm>
-            <a:off x="5212080" y="3383280"/>
+            <a:off x="640080" y="3383280"/>
             <a:ext cx="1737360" cy="1371600"/>
           </a:xfrm>
           <a:prstGeom prst="rect">
@@ -8906,7 +8658,7 @@
           <a:bodyPr wrap="square" lIns="0" tIns="0" rIns="0" bIns="0" rtlCol="0" anchor="t"/>
           <a:lstStyle/>
           <a:p>
-            <a:pPr indent="0" marL="0">
+            <a:pPr marL="0" indent="0">
               <a:buNone/>
             </a:pPr>
             <a:r>
@@ -8915,7 +8667,7 @@
                   <a:schemeClr val="tx1"/>
                 </a:solidFill>
               </a:rPr>
-              <a:t>MySQL 8 accessed through JDBC</a:t>
+              <a:t>JSP, JSTL, HTML5, CSS3, vanilla JavaScript</a:t>
             </a:r>
             <a:endParaRPr lang="en-US" sz="1400" dirty="0"/>
           </a:p>
@@ -8923,13 +8675,13 @@
       </p:sp>
       <p:sp>
         <p:nvSpPr>
-          <p:cNvPr id="19" name="tech-tile"/>
+          <p:cNvPr id="9" name="tech-tile"/>
           <p:cNvSpPr/>
           <p:nvPr/>
         </p:nvSpPr>
         <p:spPr>
           <a:xfrm>
-            <a:off x="7315200" y="1554480"/>
+            <a:off x="2743200" y="1554480"/>
             <a:ext cx="2103120" cy="3383280"/>
           </a:xfrm>
           <a:prstGeom prst="roundRect">
@@ -8945,13 +8697,13 @@
       </p:sp>
       <p:sp>
         <p:nvSpPr>
-          <p:cNvPr id="20" name="icon-circle"/>
+          <p:cNvPr id="10" name="icon-circle"/>
           <p:cNvSpPr/>
           <p:nvPr/>
         </p:nvSpPr>
         <p:spPr>
           <a:xfrm>
-            <a:off x="7498080" y="1828800"/>
+            <a:off x="2926080" y="1828800"/>
             <a:ext cx="822960" cy="822960"/>
           </a:xfrm>
           <a:prstGeom prst="ellipse">
@@ -8965,7 +8717,7 @@
       </p:sp>
       <p:pic>
         <p:nvPicPr>
-          <p:cNvPr id="21" name="icon" descr="preencoded.png">    </p:cNvPr>
+          <p:cNvPr id="11" name="icon" descr="preencoded.png"/>
           <p:cNvPicPr>
             <a:picLocks noChangeAspect="1"/>
           </p:cNvPicPr>
@@ -8979,7 +8731,7 @@
         </p:blipFill>
         <p:spPr>
           <a:xfrm>
-            <a:off x="7679131" y="2009851"/>
+            <a:off x="3107131" y="2009851"/>
             <a:ext cx="460858" cy="460858"/>
           </a:xfrm>
           <a:prstGeom prst="rect">
@@ -8989,13 +8741,13 @@
       </p:pic>
       <p:sp>
         <p:nvSpPr>
-          <p:cNvPr id="22" name="Text 15"/>
+          <p:cNvPr id="12" name="Text 7"/>
           <p:cNvSpPr txBox="1"/>
           <p:nvPr/>
         </p:nvSpPr>
         <p:spPr>
           <a:xfrm>
-            <a:off x="7498080" y="2880360"/>
+            <a:off x="2926080" y="2880360"/>
             <a:ext cx="1737360" cy="411480"/>
           </a:xfrm>
           <a:prstGeom prst="rect">
@@ -9008,7 +8760,7 @@
           <a:bodyPr wrap="square" lIns="0" tIns="0" rIns="0" bIns="0" rtlCol="0" anchor="t"/>
           <a:lstStyle/>
           <a:p>
-            <a:pPr indent="0" marL="0">
+            <a:pPr marL="0" indent="0">
               <a:buNone/>
             </a:pPr>
             <a:r>
@@ -9017,7 +8769,7 @@
                   <a:schemeClr val="tx1"/>
                 </a:solidFill>
               </a:rPr>
-              <a:t>Build</a:t>
+              <a:t>Backend</a:t>
             </a:r>
             <a:endParaRPr lang="en-US" sz="2000" dirty="0"/>
           </a:p>
@@ -9025,13 +8777,13 @@
       </p:sp>
       <p:sp>
         <p:nvSpPr>
-          <p:cNvPr id="23" name="Text 16"/>
+          <p:cNvPr id="13" name="Text 8"/>
           <p:cNvSpPr txBox="1"/>
           <p:nvPr/>
         </p:nvSpPr>
         <p:spPr>
           <a:xfrm>
-            <a:off x="7498080" y="3383280"/>
+            <a:off x="2926080" y="3383280"/>
             <a:ext cx="1737360" cy="1371600"/>
           </a:xfrm>
           <a:prstGeom prst="rect">
@@ -9044,7 +8796,7 @@
           <a:bodyPr wrap="square" lIns="0" tIns="0" rIns="0" bIns="0" rtlCol="0" anchor="t"/>
           <a:lstStyle/>
           <a:p>
-            <a:pPr indent="0" marL="0">
+            <a:pPr marL="0" indent="0">
               <a:buNone/>
             </a:pPr>
             <a:r>
@@ -9053,7 +8805,7 @@
                   <a:schemeClr val="tx1"/>
                 </a:solidFill>
               </a:rPr>
-              <a:t>Maven, packaged as a WAR file</a:t>
+              <a:t>Java 11, Servlets 4.0, Filters, Listeners</a:t>
             </a:r>
             <a:endParaRPr lang="en-US" sz="1400" dirty="0"/>
           </a:p>
@@ -9061,13 +8813,13 @@
       </p:sp>
       <p:sp>
         <p:nvSpPr>
-          <p:cNvPr id="24" name="tech-tile"/>
+          <p:cNvPr id="14" name="tech-tile"/>
           <p:cNvSpPr/>
           <p:nvPr/>
         </p:nvSpPr>
         <p:spPr>
           <a:xfrm>
-            <a:off x="9601200" y="1554480"/>
+            <a:off x="5029200" y="1554480"/>
             <a:ext cx="2103120" cy="3383280"/>
           </a:xfrm>
           <a:prstGeom prst="roundRect">
@@ -9083,13 +8835,13 @@
       </p:sp>
       <p:sp>
         <p:nvSpPr>
-          <p:cNvPr id="25" name="icon-circle"/>
+          <p:cNvPr id="15" name="icon-circle"/>
           <p:cNvSpPr/>
           <p:nvPr/>
         </p:nvSpPr>
         <p:spPr>
           <a:xfrm>
-            <a:off x="9784080" y="1828800"/>
+            <a:off x="5212080" y="1828800"/>
             <a:ext cx="822960" cy="822960"/>
           </a:xfrm>
           <a:prstGeom prst="ellipse">
@@ -9103,7 +8855,7 @@
       </p:sp>
       <p:pic>
         <p:nvPicPr>
-          <p:cNvPr id="26" name="icon" descr="preencoded.png">    </p:cNvPr>
+          <p:cNvPr id="16" name="icon" descr="preencoded.png"/>
           <p:cNvPicPr>
             <a:picLocks noChangeAspect="1"/>
           </p:cNvPicPr>
@@ -9117,6 +8869,282 @@
         </p:blipFill>
         <p:spPr>
           <a:xfrm>
+            <a:off x="5393131" y="2009851"/>
+            <a:ext cx="460858" cy="460858"/>
+          </a:xfrm>
+          <a:prstGeom prst="rect">
+            <a:avLst/>
+          </a:prstGeom>
+        </p:spPr>
+      </p:pic>
+      <p:sp>
+        <p:nvSpPr>
+          <p:cNvPr id="17" name="Text 11"/>
+          <p:cNvSpPr txBox="1"/>
+          <p:nvPr/>
+        </p:nvSpPr>
+        <p:spPr>
+          <a:xfrm>
+            <a:off x="5212080" y="2880360"/>
+            <a:ext cx="1737360" cy="411480"/>
+          </a:xfrm>
+          <a:prstGeom prst="rect">
+            <a:avLst/>
+          </a:prstGeom>
+          <a:noFill/>
+          <a:ln/>
+        </p:spPr>
+        <p:txBody>
+          <a:bodyPr wrap="square" lIns="0" tIns="0" rIns="0" bIns="0" rtlCol="0" anchor="t"/>
+          <a:lstStyle/>
+          <a:p>
+            <a:pPr marL="0" indent="0">
+              <a:buNone/>
+            </a:pPr>
+            <a:r>
+              <a:rPr lang="en-US" sz="2000" b="1" dirty="0">
+                <a:solidFill>
+                  <a:schemeClr val="tx1"/>
+                </a:solidFill>
+              </a:rPr>
+              <a:t>Database</a:t>
+            </a:r>
+            <a:endParaRPr lang="en-US" sz="2000" dirty="0"/>
+          </a:p>
+        </p:txBody>
+      </p:sp>
+      <p:sp>
+        <p:nvSpPr>
+          <p:cNvPr id="18" name="Text 12"/>
+          <p:cNvSpPr txBox="1"/>
+          <p:nvPr/>
+        </p:nvSpPr>
+        <p:spPr>
+          <a:xfrm>
+            <a:off x="5212080" y="3383280"/>
+            <a:ext cx="1737360" cy="1371600"/>
+          </a:xfrm>
+          <a:prstGeom prst="rect">
+            <a:avLst/>
+          </a:prstGeom>
+          <a:noFill/>
+          <a:ln/>
+        </p:spPr>
+        <p:txBody>
+          <a:bodyPr wrap="square" lIns="0" tIns="0" rIns="0" bIns="0" rtlCol="0" anchor="t"/>
+          <a:lstStyle/>
+          <a:p>
+            <a:pPr marL="0" indent="0">
+              <a:buNone/>
+            </a:pPr>
+            <a:r>
+              <a:rPr lang="en-US" sz="1400" dirty="0">
+                <a:solidFill>
+                  <a:schemeClr val="tx1"/>
+                </a:solidFill>
+              </a:rPr>
+              <a:t>MySQL 8 accessed through JDBC</a:t>
+            </a:r>
+            <a:endParaRPr lang="en-US" sz="1400" dirty="0"/>
+          </a:p>
+        </p:txBody>
+      </p:sp>
+      <p:sp>
+        <p:nvSpPr>
+          <p:cNvPr id="19" name="tech-tile"/>
+          <p:cNvSpPr/>
+          <p:nvPr/>
+        </p:nvSpPr>
+        <p:spPr>
+          <a:xfrm>
+            <a:off x="7315200" y="1554480"/>
+            <a:ext cx="2103120" cy="3383280"/>
+          </a:xfrm>
+          <a:prstGeom prst="roundRect">
+            <a:avLst>
+              <a:gd name="adj" fmla="val 5217"/>
+            </a:avLst>
+          </a:prstGeom>
+          <a:solidFill>
+            <a:schemeClr val="bg2"/>
+          </a:solidFill>
+          <a:ln/>
+        </p:spPr>
+      </p:sp>
+      <p:sp>
+        <p:nvSpPr>
+          <p:cNvPr id="20" name="icon-circle"/>
+          <p:cNvSpPr/>
+          <p:nvPr/>
+        </p:nvSpPr>
+        <p:spPr>
+          <a:xfrm>
+            <a:off x="7498080" y="1828800"/>
+            <a:ext cx="822960" cy="822960"/>
+          </a:xfrm>
+          <a:prstGeom prst="ellipse">
+            <a:avLst/>
+          </a:prstGeom>
+          <a:solidFill>
+            <a:schemeClr val="accent2"/>
+          </a:solidFill>
+          <a:ln/>
+        </p:spPr>
+      </p:sp>
+      <p:pic>
+        <p:nvPicPr>
+          <p:cNvPr id="21" name="icon" descr="preencoded.png"/>
+          <p:cNvPicPr>
+            <a:picLocks noChangeAspect="1"/>
+          </p:cNvPicPr>
+          <p:nvPr/>
+        </p:nvPicPr>
+        <p:blipFill>
+          <a:blip r:embed="rId6"/>
+          <a:stretch>
+            <a:fillRect/>
+          </a:stretch>
+        </p:blipFill>
+        <p:spPr>
+          <a:xfrm>
+            <a:off x="7679131" y="2009851"/>
+            <a:ext cx="460858" cy="460858"/>
+          </a:xfrm>
+          <a:prstGeom prst="rect">
+            <a:avLst/>
+          </a:prstGeom>
+        </p:spPr>
+      </p:pic>
+      <p:sp>
+        <p:nvSpPr>
+          <p:cNvPr id="22" name="Text 15"/>
+          <p:cNvSpPr txBox="1"/>
+          <p:nvPr/>
+        </p:nvSpPr>
+        <p:spPr>
+          <a:xfrm>
+            <a:off x="7498080" y="2880360"/>
+            <a:ext cx="1737360" cy="411480"/>
+          </a:xfrm>
+          <a:prstGeom prst="rect">
+            <a:avLst/>
+          </a:prstGeom>
+          <a:noFill/>
+          <a:ln/>
+        </p:spPr>
+        <p:txBody>
+          <a:bodyPr wrap="square" lIns="0" tIns="0" rIns="0" bIns="0" rtlCol="0" anchor="t"/>
+          <a:lstStyle/>
+          <a:p>
+            <a:pPr marL="0" indent="0">
+              <a:buNone/>
+            </a:pPr>
+            <a:r>
+              <a:rPr lang="en-US" sz="2000" b="1" dirty="0">
+                <a:solidFill>
+                  <a:schemeClr val="tx1"/>
+                </a:solidFill>
+              </a:rPr>
+              <a:t>Build</a:t>
+            </a:r>
+            <a:endParaRPr lang="en-US" sz="2000" dirty="0"/>
+          </a:p>
+        </p:txBody>
+      </p:sp>
+      <p:sp>
+        <p:nvSpPr>
+          <p:cNvPr id="23" name="Text 16"/>
+          <p:cNvSpPr txBox="1"/>
+          <p:nvPr/>
+        </p:nvSpPr>
+        <p:spPr>
+          <a:xfrm>
+            <a:off x="7498080" y="3383280"/>
+            <a:ext cx="1737360" cy="1371600"/>
+          </a:xfrm>
+          <a:prstGeom prst="rect">
+            <a:avLst/>
+          </a:prstGeom>
+          <a:noFill/>
+          <a:ln/>
+        </p:spPr>
+        <p:txBody>
+          <a:bodyPr wrap="square" lIns="0" tIns="0" rIns="0" bIns="0" rtlCol="0" anchor="t"/>
+          <a:lstStyle/>
+          <a:p>
+            <a:pPr marL="0" indent="0">
+              <a:buNone/>
+            </a:pPr>
+            <a:r>
+              <a:rPr lang="en-US" sz="1400" dirty="0">
+                <a:solidFill>
+                  <a:schemeClr val="tx1"/>
+                </a:solidFill>
+              </a:rPr>
+              <a:t>Maven, packaged as a WAR file</a:t>
+            </a:r>
+            <a:endParaRPr lang="en-US" sz="1400" dirty="0"/>
+          </a:p>
+        </p:txBody>
+      </p:sp>
+      <p:sp>
+        <p:nvSpPr>
+          <p:cNvPr id="24" name="tech-tile"/>
+          <p:cNvSpPr/>
+          <p:nvPr/>
+        </p:nvSpPr>
+        <p:spPr>
+          <a:xfrm>
+            <a:off x="9601200" y="1554480"/>
+            <a:ext cx="2103120" cy="3383280"/>
+          </a:xfrm>
+          <a:prstGeom prst="roundRect">
+            <a:avLst>
+              <a:gd name="adj" fmla="val 5217"/>
+            </a:avLst>
+          </a:prstGeom>
+          <a:solidFill>
+            <a:schemeClr val="bg2"/>
+          </a:solidFill>
+          <a:ln/>
+        </p:spPr>
+      </p:sp>
+      <p:sp>
+        <p:nvSpPr>
+          <p:cNvPr id="25" name="icon-circle"/>
+          <p:cNvSpPr/>
+          <p:nvPr/>
+        </p:nvSpPr>
+        <p:spPr>
+          <a:xfrm>
+            <a:off x="9784080" y="1828800"/>
+            <a:ext cx="822960" cy="822960"/>
+          </a:xfrm>
+          <a:prstGeom prst="ellipse">
+            <a:avLst/>
+          </a:prstGeom>
+          <a:solidFill>
+            <a:schemeClr val="accent1"/>
+          </a:solidFill>
+          <a:ln/>
+        </p:spPr>
+      </p:sp>
+      <p:pic>
+        <p:nvPicPr>
+          <p:cNvPr id="26" name="icon" descr="preencoded.png"/>
+          <p:cNvPicPr>
+            <a:picLocks noChangeAspect="1"/>
+          </p:cNvPicPr>
+          <p:nvPr/>
+        </p:nvPicPr>
+        <p:blipFill>
+          <a:blip r:embed="rId7"/>
+          <a:stretch>
+            <a:fillRect/>
+          </a:stretch>
+        </p:blipFill>
+        <p:spPr>
+          <a:xfrm>
             <a:off x="9965131" y="2009851"/>
             <a:ext cx="460858" cy="460858"/>
           </a:xfrm>
@@ -9146,7 +9174,7 @@
           <a:bodyPr wrap="square" lIns="0" tIns="0" rIns="0" bIns="0" rtlCol="0" anchor="t"/>
           <a:lstStyle/>
           <a:p>
-            <a:pPr indent="0" marL="0">
+            <a:pPr marL="0" indent="0">
               <a:buNone/>
             </a:pPr>
             <a:r>
@@ -9182,7 +9210,7 @@
           <a:bodyPr wrap="square" lIns="0" tIns="0" rIns="0" bIns="0" rtlCol="0" anchor="t"/>
           <a:lstStyle/>
           <a:p>
-            <a:pPr indent="0" marL="0">
+            <a:pPr marL="0" indent="0">
               <a:buNone/>
             </a:pPr>
             <a:r>
@@ -9240,7 +9268,7 @@
           <a:bodyPr wrap="square" lIns="0" tIns="0" rIns="0" bIns="0" rtlCol="0" anchor="ctr"/>
           <a:lstStyle/>
           <a:p>
-            <a:pPr indent="0" marL="0">
+            <a:pPr marL="0" indent="0">
               <a:buNone/>
             </a:pPr>
             <a:r>
@@ -9257,7 +9285,7 @@
       </p:sp>
       <p:sp>
         <p:nvSpPr>
-          <p:cNvPr id="25" name="Slide Number Placeholder 0"/>
+          <p:cNvPr id="3" name="Slide Number Placeholder 0"/>
           <p:cNvSpPr>
             <a:spLocks noGrp="1"/>
           </p:cNvSpPr>
@@ -9275,7 +9303,7 @@
           </a:prstGeom>
           <a:extLst>
             <a:ext uri="{C572A759-6A51-4108-AA02-DFA0A04FC94B}">
-              <ma14:wrappingTextBoxFlag xmlns:ma14="http://schemas.microsoft.com/office/mac/drawingml/2011/main" val="0"/>
+              <ma14:wrappingTextBoxFlag xmlns:ma14="http://schemas.microsoft.com/office/mac/drawingml/2011/main" xmlns="" val="0"/>
             </a:ext>
           </a:extLst>
         </p:spPr>
@@ -9293,7 +9321,7 @@
           <a:p>
             <a:pPr algn="l"/>
             <a:fld id="{F7021451-1387-4CA6-816F-3879F97B5CBC}" type="slidenum">
-              <a:rPr b="0" lang="en-US"/>
+              <a:rPr lang="en-US" b="0"/>
               <a:t>4</a:t>
             </a:fld>
             <a:endParaRPr lang="en-US"/>
@@ -9328,9 +9356,11 @@
       <p:sp>
         <p:nvSpPr>
           <p:cNvPr id="2" name="Text 0"/>
-          <p:cNvSpPr/>
+          <p:cNvSpPr>
+            <a:spLocks noGrp="1"/>
+          </p:cNvSpPr>
           <p:nvPr>
-            <p:ph idx="100" type="title" hasCustomPrompt="1"/>
+            <p:ph type="title" idx="100" hasCustomPrompt="1"/>
           </p:nvPr>
         </p:nvSpPr>
         <p:spPr>
@@ -9348,7 +9378,7 @@
           <a:bodyPr wrap="square" lIns="0" tIns="0" rIns="0" bIns="0" rtlCol="0" anchor="ctr"/>
           <a:lstStyle/>
           <a:p>
-            <a:pPr algn="l" indent="0" marL="0">
+            <a:pPr marL="0" indent="0" algn="l">
               <a:buNone/>
             </a:pPr>
             <a:r>
@@ -9406,7 +9436,7 @@
           <a:bodyPr wrap="square" lIns="0" tIns="0" rIns="0" bIns="0" rtlCol="0" anchor="ctr"/>
           <a:lstStyle/>
           <a:p>
-            <a:pPr algn="ctr" indent="0" marL="0">
+            <a:pPr marL="0" indent="0" algn="ctr">
               <a:buNone/>
             </a:pPr>
             <a:r>
@@ -9420,7 +9450,7 @@
             <a:endParaRPr lang="en-US" sz="1400" dirty="0"/>
           </a:p>
           <a:p>
-            <a:pPr algn="ctr" indent="0" marL="0">
+            <a:pPr marL="0" indent="0" algn="ctr">
               <a:buNone/>
             </a:pPr>
             <a:r>
@@ -9498,7 +9528,7 @@
           <a:bodyPr wrap="square" lIns="0" tIns="0" rIns="0" bIns="0" rtlCol="0" anchor="ctr"/>
           <a:lstStyle/>
           <a:p>
-            <a:pPr algn="ctr" indent="0" marL="0">
+            <a:pPr marL="0" indent="0" algn="ctr">
               <a:buNone/>
             </a:pPr>
             <a:r>
@@ -9512,7 +9542,7 @@
             <a:endParaRPr lang="en-US" sz="1400" dirty="0"/>
           </a:p>
           <a:p>
-            <a:pPr algn="ctr" indent="0" marL="0">
+            <a:pPr marL="0" indent="0" algn="ctr">
               <a:buNone/>
             </a:pPr>
             <a:r>
@@ -9590,7 +9620,7 @@
           <a:bodyPr wrap="square" lIns="0" tIns="0" rIns="0" bIns="0" rtlCol="0" anchor="ctr"/>
           <a:lstStyle/>
           <a:p>
-            <a:pPr algn="ctr" indent="0" marL="0">
+            <a:pPr marL="0" indent="0" algn="ctr">
               <a:buNone/>
             </a:pPr>
             <a:r>
@@ -9604,7 +9634,7 @@
             <a:endParaRPr lang="en-US" sz="1400" dirty="0"/>
           </a:p>
           <a:p>
-            <a:pPr algn="ctr" indent="0" marL="0">
+            <a:pPr marL="0" indent="0" algn="ctr">
               <a:buNone/>
             </a:pPr>
             <a:r>
@@ -9682,7 +9712,7 @@
           <a:bodyPr wrap="square" lIns="0" tIns="0" rIns="0" bIns="0" rtlCol="0" anchor="ctr"/>
           <a:lstStyle/>
           <a:p>
-            <a:pPr algn="ctr" indent="0" marL="0">
+            <a:pPr marL="0" indent="0" algn="ctr">
               <a:buNone/>
             </a:pPr>
             <a:r>
@@ -9696,7 +9726,7 @@
             <a:endParaRPr lang="en-US" sz="1400" dirty="0"/>
           </a:p>
           <a:p>
-            <a:pPr algn="ctr" indent="0" marL="0">
+            <a:pPr marL="0" indent="0" algn="ctr">
               <a:buNone/>
             </a:pPr>
             <a:r>
@@ -9774,7 +9804,7 @@
           <a:bodyPr wrap="square" lIns="0" tIns="0" rIns="0" bIns="0" rtlCol="0" anchor="ctr"/>
           <a:lstStyle/>
           <a:p>
-            <a:pPr algn="ctr" indent="0" marL="0">
+            <a:pPr marL="0" indent="0" algn="ctr">
               <a:buNone/>
             </a:pPr>
             <a:r>
@@ -9788,7 +9818,7 @@
             <a:endParaRPr lang="en-US" sz="1400" dirty="0"/>
           </a:p>
           <a:p>
-            <a:pPr algn="ctr" indent="0" marL="0">
+            <a:pPr marL="0" indent="0" algn="ctr">
               <a:buNone/>
             </a:pPr>
             <a:r>
@@ -9824,7 +9854,7 @@
           <a:bodyPr wrap="square" lIns="0" tIns="0" rIns="0" bIns="0" rtlCol="0" anchor="t"/>
           <a:lstStyle/>
           <a:p>
-            <a:pPr algn="ctr" indent="0" marL="0">
+            <a:pPr marL="0" indent="0" algn="ctr">
               <a:buNone/>
             </a:pPr>
             <a:r>
@@ -9860,7 +9890,7 @@
           <a:bodyPr wrap="square" lIns="0" tIns="0" rIns="0" bIns="0" rtlCol="0" anchor="t"/>
           <a:lstStyle/>
           <a:p>
-            <a:pPr algn="ctr" indent="0" marL="0">
+            <a:pPr marL="0" indent="0" algn="ctr">
               <a:buNone/>
             </a:pPr>
             <a:r>
@@ -9896,7 +9926,7 @@
           <a:bodyPr wrap="square" lIns="0" tIns="0" rIns="0" bIns="0" rtlCol="0" anchor="t"/>
           <a:lstStyle/>
           <a:p>
-            <a:pPr algn="ctr" indent="0" marL="0">
+            <a:pPr marL="0" indent="0" algn="ctr">
               <a:buNone/>
             </a:pPr>
             <a:r>
@@ -9954,7 +9984,7 @@
           <a:bodyPr wrap="square" lIns="0" tIns="0" rIns="0" bIns="0" rtlCol="0" anchor="t"/>
           <a:lstStyle/>
           <a:p>
-            <a:pPr indent="0" marL="0">
+            <a:pPr marL="0" indent="0">
               <a:buNone/>
             </a:pPr>
             <a:r>
@@ -9990,7 +10020,7 @@
           <a:bodyPr wrap="square" lIns="0" tIns="0" rIns="0" bIns="0" rtlCol="0" anchor="t"/>
           <a:lstStyle/>
           <a:p>
-            <a:pPr indent="0" marL="0">
+            <a:pPr marL="0" indent="0">
               <a:buNone/>
             </a:pPr>
             <a:r>
@@ -10048,7 +10078,7 @@
           <a:bodyPr wrap="square" lIns="0" tIns="0" rIns="0" bIns="0" rtlCol="0" anchor="t"/>
           <a:lstStyle/>
           <a:p>
-            <a:pPr indent="0" marL="0">
+            <a:pPr marL="0" indent="0">
               <a:buNone/>
             </a:pPr>
             <a:r>
@@ -10084,7 +10114,7 @@
           <a:bodyPr wrap="square" lIns="0" tIns="0" rIns="0" bIns="0" rtlCol="0" anchor="t"/>
           <a:lstStyle/>
           <a:p>
-            <a:pPr indent="0" marL="0">
+            <a:pPr marL="0" indent="0">
               <a:buNone/>
             </a:pPr>
             <a:r>
@@ -10142,7 +10172,7 @@
           <a:bodyPr wrap="square" lIns="0" tIns="0" rIns="0" bIns="0" rtlCol="0" anchor="t"/>
           <a:lstStyle/>
           <a:p>
-            <a:pPr indent="0" marL="0">
+            <a:pPr marL="0" indent="0">
               <a:buNone/>
             </a:pPr>
             <a:r>
@@ -10178,7 +10208,7 @@
           <a:bodyPr wrap="square" lIns="0" tIns="0" rIns="0" bIns="0" rtlCol="0" anchor="t"/>
           <a:lstStyle/>
           <a:p>
-            <a:pPr indent="0" marL="0">
+            <a:pPr marL="0" indent="0">
               <a:buNone/>
             </a:pPr>
             <a:r>
@@ -10195,7 +10225,7 @@
       </p:sp>
       <p:sp>
         <p:nvSpPr>
-          <p:cNvPr id="25" name="Slide Number Placeholder 0"/>
+          <p:cNvPr id="3" name="Slide Number Placeholder 0"/>
           <p:cNvSpPr>
             <a:spLocks noGrp="1"/>
           </p:cNvSpPr>
@@ -10213,7 +10243,7 @@
           </a:prstGeom>
           <a:extLst>
             <a:ext uri="{C572A759-6A51-4108-AA02-DFA0A04FC94B}">
-              <ma14:wrappingTextBoxFlag xmlns:ma14="http://schemas.microsoft.com/office/mac/drawingml/2011/main" val="0"/>
+              <ma14:wrappingTextBoxFlag xmlns:ma14="http://schemas.microsoft.com/office/mac/drawingml/2011/main" xmlns="" val="0"/>
             </a:ext>
           </a:extLst>
         </p:spPr>
@@ -10231,7 +10261,7 @@
           <a:p>
             <a:pPr algn="l"/>
             <a:fld id="{F7021451-1387-4CA6-816F-3879F97B5CBC}" type="slidenum">
-              <a:rPr b="0" lang="en-US"/>
+              <a:rPr lang="en-US" b="0"/>
               <a:t>5</a:t>
             </a:fld>
             <a:endParaRPr lang="en-US"/>
@@ -10266,9 +10296,11 @@
       <p:sp>
         <p:nvSpPr>
           <p:cNvPr id="2" name="Text 0"/>
-          <p:cNvSpPr/>
+          <p:cNvSpPr>
+            <a:spLocks noGrp="1"/>
+          </p:cNvSpPr>
           <p:nvPr>
-            <p:ph idx="100" type="title" hasCustomPrompt="1"/>
+            <p:ph type="title" idx="100" hasCustomPrompt="1"/>
           </p:nvPr>
         </p:nvSpPr>
         <p:spPr>
@@ -10286,7 +10318,7 @@
           <a:bodyPr wrap="square" lIns="0" tIns="0" rIns="0" bIns="0" rtlCol="0" anchor="ctr"/>
           <a:lstStyle/>
           <a:p>
-            <a:pPr algn="l" indent="0" marL="0">
+            <a:pPr marL="0" indent="0" algn="l">
               <a:buNone/>
             </a:pPr>
             <a:r>
@@ -10344,7 +10376,7 @@
           <a:bodyPr wrap="square" lIns="0" tIns="0" rIns="0" bIns="0" rtlCol="0" anchor="t"/>
           <a:lstStyle/>
           <a:p>
-            <a:pPr indent="0" marL="0">
+            <a:pPr marL="0" indent="0">
               <a:buNone/>
             </a:pPr>
             <a:r>
@@ -10361,7 +10393,7 @@
             <a:endParaRPr lang="en-US" sz="1500" dirty="0"/>
           </a:p>
           <a:p>
-            <a:pPr indent="0" marL="0">
+            <a:pPr marL="0" indent="0">
               <a:buNone/>
             </a:pPr>
             <a:r>
@@ -10378,7 +10410,7 @@
             <a:endParaRPr lang="en-US" sz="1500" dirty="0"/>
           </a:p>
           <a:p>
-            <a:pPr indent="0" marL="0">
+            <a:pPr marL="0" indent="0">
               <a:buNone/>
             </a:pPr>
             <a:r>
@@ -10395,7 +10427,7 @@
             <a:endParaRPr lang="en-US" sz="1500" dirty="0"/>
           </a:p>
           <a:p>
-            <a:pPr indent="0" marL="0">
+            <a:pPr marL="0" indent="0">
               <a:buNone/>
             </a:pPr>
             <a:r>
@@ -10412,7 +10444,7 @@
             <a:endParaRPr lang="en-US" sz="1500" dirty="0"/>
           </a:p>
           <a:p>
-            <a:pPr indent="0" marL="0">
+            <a:pPr marL="0" indent="0">
               <a:buNone/>
             </a:pPr>
             <a:r>
@@ -10429,7 +10461,7 @@
             <a:endParaRPr lang="en-US" sz="1500" dirty="0"/>
           </a:p>
           <a:p>
-            <a:pPr indent="0" marL="0">
+            <a:pPr marL="0" indent="0">
               <a:buNone/>
             </a:pPr>
             <a:r>
@@ -10446,7 +10478,7 @@
             <a:endParaRPr lang="en-US" sz="1500" dirty="0"/>
           </a:p>
           <a:p>
-            <a:pPr indent="0" marL="0">
+            <a:pPr marL="0" indent="0">
               <a:buNone/>
             </a:pPr>
             <a:r>
@@ -10463,7 +10495,7 @@
             <a:endParaRPr lang="en-US" sz="1500" dirty="0"/>
           </a:p>
           <a:p>
-            <a:pPr indent="0" marL="0">
+            <a:pPr marL="0" indent="0">
               <a:buNone/>
             </a:pPr>
             <a:r>
@@ -10480,7 +10512,7 @@
             <a:endParaRPr lang="en-US" sz="1500" dirty="0"/>
           </a:p>
           <a:p>
-            <a:pPr indent="0" marL="0">
+            <a:pPr marL="0" indent="0">
               <a:buNone/>
             </a:pPr>
             <a:r>
@@ -10497,7 +10529,7 @@
             <a:endParaRPr lang="en-US" sz="1500" dirty="0"/>
           </a:p>
           <a:p>
-            <a:pPr indent="0" marL="0">
+            <a:pPr marL="0" indent="0">
               <a:buNone/>
             </a:pPr>
             <a:r>
@@ -10514,7 +10546,7 @@
             <a:endParaRPr lang="en-US" sz="1500" dirty="0"/>
           </a:p>
           <a:p>
-            <a:pPr indent="0" marL="0">
+            <a:pPr marL="0" indent="0">
               <a:buNone/>
             </a:pPr>
             <a:r>
@@ -10531,7 +10563,7 @@
             <a:endParaRPr lang="en-US" sz="1500" dirty="0"/>
           </a:p>
           <a:p>
-            <a:pPr indent="0" marL="0">
+            <a:pPr marL="0" indent="0">
               <a:buNone/>
             </a:pPr>
             <a:r>
@@ -10548,7 +10580,7 @@
             <a:endParaRPr lang="en-US" sz="1500" dirty="0"/>
           </a:p>
           <a:p>
-            <a:pPr indent="0" marL="0">
+            <a:pPr marL="0" indent="0">
               <a:buNone/>
             </a:pPr>
             <a:r>
@@ -10565,7 +10597,7 @@
             <a:endParaRPr lang="en-US" sz="1500" dirty="0"/>
           </a:p>
           <a:p>
-            <a:pPr indent="0" marL="0">
+            <a:pPr marL="0" indent="0">
               <a:buNone/>
             </a:pPr>
             <a:r>
@@ -10626,7 +10658,7 @@
           <a:bodyPr wrap="square" lIns="0" tIns="0" rIns="0" bIns="0" rtlCol="0" anchor="t"/>
           <a:lstStyle/>
           <a:p>
-            <a:pPr algn="ctr" indent="0" marL="0">
+            <a:pPr marL="0" indent="0" algn="ctr">
               <a:buNone/>
             </a:pPr>
             <a:r>
@@ -10662,7 +10694,7 @@
           <a:bodyPr wrap="square" lIns="0" tIns="0" rIns="0" bIns="0" rtlCol="0" anchor="t"/>
           <a:lstStyle/>
           <a:p>
-            <a:pPr algn="ctr" indent="0" marL="0">
+            <a:pPr marL="0" indent="0" algn="ctr">
               <a:buNone/>
             </a:pPr>
             <a:r>
@@ -10720,7 +10752,7 @@
           <a:bodyPr wrap="square" lIns="0" tIns="0" rIns="0" bIns="0" rtlCol="0" anchor="t"/>
           <a:lstStyle/>
           <a:p>
-            <a:pPr algn="ctr" indent="0" marL="0">
+            <a:pPr marL="0" indent="0" algn="ctr">
               <a:buNone/>
             </a:pPr>
             <a:r>
@@ -10756,7 +10788,7 @@
           <a:bodyPr wrap="square" lIns="0" tIns="0" rIns="0" bIns="0" rtlCol="0" anchor="t"/>
           <a:lstStyle/>
           <a:p>
-            <a:pPr algn="ctr" indent="0" marL="0">
+            <a:pPr marL="0" indent="0" algn="ctr">
               <a:buNone/>
             </a:pPr>
             <a:r>
@@ -10814,7 +10846,7 @@
           <a:bodyPr wrap="square" lIns="0" tIns="0" rIns="0" bIns="0" rtlCol="0" anchor="t"/>
           <a:lstStyle/>
           <a:p>
-            <a:pPr algn="ctr" indent="0" marL="0">
+            <a:pPr marL="0" indent="0" algn="ctr">
               <a:buNone/>
             </a:pPr>
             <a:r>
@@ -10850,7 +10882,7 @@
           <a:bodyPr wrap="square" lIns="0" tIns="0" rIns="0" bIns="0" rtlCol="0" anchor="t"/>
           <a:lstStyle/>
           <a:p>
-            <a:pPr algn="ctr" indent="0" marL="0">
+            <a:pPr marL="0" indent="0" algn="ctr">
               <a:buNone/>
             </a:pPr>
             <a:r>
@@ -10908,7 +10940,7 @@
           <a:bodyPr wrap="square" lIns="0" tIns="0" rIns="0" bIns="0" rtlCol="0" anchor="t"/>
           <a:lstStyle/>
           <a:p>
-            <a:pPr algn="ctr" indent="0" marL="0">
+            <a:pPr marL="0" indent="0" algn="ctr">
               <a:buNone/>
             </a:pPr>
             <a:r>
@@ -10944,7 +10976,7 @@
           <a:bodyPr wrap="square" lIns="0" tIns="0" rIns="0" bIns="0" rtlCol="0" anchor="t"/>
           <a:lstStyle/>
           <a:p>
-            <a:pPr algn="ctr" indent="0" marL="0">
+            <a:pPr marL="0" indent="0" algn="ctr">
               <a:buNone/>
             </a:pPr>
             <a:r>
@@ -10979,7 +11011,7 @@
           </a:prstGeom>
           <a:extLst>
             <a:ext uri="{C572A759-6A51-4108-AA02-DFA0A04FC94B}">
-              <ma14:wrappingTextBoxFlag xmlns:ma14="http://schemas.microsoft.com/office/mac/drawingml/2011/main" val="0"/>
+              <ma14:wrappingTextBoxFlag xmlns:ma14="http://schemas.microsoft.com/office/mac/drawingml/2011/main" xmlns="" val="0"/>
             </a:ext>
           </a:extLst>
         </p:spPr>
@@ -10997,7 +11029,7 @@
           <a:p>
             <a:pPr algn="l"/>
             <a:fld id="{F7021451-1387-4CA6-816F-3879F97B5CBC}" type="slidenum">
-              <a:rPr b="0" lang="en-US"/>
+              <a:rPr lang="en-US" b="0"/>
               <a:t>6</a:t>
             </a:fld>
             <a:endParaRPr lang="en-US"/>
@@ -11032,9 +11064,11 @@
       <p:sp>
         <p:nvSpPr>
           <p:cNvPr id="2" name="Text 0"/>
-          <p:cNvSpPr/>
+          <p:cNvSpPr>
+            <a:spLocks noGrp="1"/>
+          </p:cNvSpPr>
           <p:nvPr>
-            <p:ph idx="100" type="title" hasCustomPrompt="1"/>
+            <p:ph type="title" idx="100" hasCustomPrompt="1"/>
           </p:nvPr>
         </p:nvSpPr>
         <p:spPr>
@@ -11052,7 +11086,7 @@
           <a:bodyPr wrap="square" lIns="0" tIns="0" rIns="0" bIns="0" rtlCol="0" anchor="ctr"/>
           <a:lstStyle/>
           <a:p>
-            <a:pPr algn="l" indent="0" marL="0">
+            <a:pPr marL="0" indent="0" algn="l">
               <a:buNone/>
             </a:pPr>
             <a:r>
@@ -11132,7 +11166,7 @@
           <a:bodyPr wrap="square" lIns="0" tIns="0" rIns="0" bIns="0" rtlCol="0" anchor="ctr"/>
           <a:lstStyle/>
           <a:p>
-            <a:pPr algn="ctr" indent="0" marL="0">
+            <a:pPr marL="0" indent="0" algn="ctr">
               <a:buNone/>
             </a:pPr>
             <a:r>
@@ -11168,7 +11202,7 @@
           <a:bodyPr wrap="square" lIns="0" tIns="0" rIns="0" bIns="0" rtlCol="0" anchor="t"/>
           <a:lstStyle/>
           <a:p>
-            <a:pPr indent="0" marL="0">
+            <a:pPr marL="0" indent="0">
               <a:spcAft>
                 <a:spcPts val="600"/>
               </a:spcAft>
@@ -11185,7 +11219,7 @@
             <a:endParaRPr lang="en-US" sz="1400" dirty="0"/>
           </a:p>
           <a:p>
-            <a:pPr indent="0" marL="0">
+            <a:pPr marL="0" indent="0">
               <a:spcAft>
                 <a:spcPts val="600"/>
               </a:spcAft>
@@ -11202,7 +11236,7 @@
             <a:endParaRPr lang="en-US" sz="1400" dirty="0"/>
           </a:p>
           <a:p>
-            <a:pPr indent="0" marL="0">
+            <a:pPr marL="0" indent="0">
               <a:spcAft>
                 <a:spcPts val="600"/>
               </a:spcAft>
@@ -11219,7 +11253,7 @@
             <a:endParaRPr lang="en-US" sz="1400" dirty="0"/>
           </a:p>
           <a:p>
-            <a:pPr indent="0" marL="0">
+            <a:pPr marL="0" indent="0">
               <a:spcAft>
                 <a:spcPts val="600"/>
               </a:spcAft>
@@ -11236,7 +11270,7 @@
             <a:endParaRPr lang="en-US" sz="1400" dirty="0"/>
           </a:p>
           <a:p>
-            <a:pPr indent="0" marL="0">
+            <a:pPr marL="0" indent="0">
               <a:spcAft>
                 <a:spcPts val="600"/>
               </a:spcAft>
@@ -11319,7 +11353,7 @@
           <a:bodyPr wrap="square" lIns="0" tIns="0" rIns="0" bIns="0" rtlCol="0" anchor="ctr"/>
           <a:lstStyle/>
           <a:p>
-            <a:pPr algn="ctr" indent="0" marL="0">
+            <a:pPr marL="0" indent="0" algn="ctr">
               <a:buNone/>
             </a:pPr>
             <a:r>
@@ -11355,7 +11389,7 @@
           <a:bodyPr wrap="square" lIns="0" tIns="0" rIns="0" bIns="0" rtlCol="0" anchor="t"/>
           <a:lstStyle/>
           <a:p>
-            <a:pPr indent="0" marL="0">
+            <a:pPr marL="0" indent="0">
               <a:spcAft>
                 <a:spcPts val="600"/>
               </a:spcAft>
@@ -11372,7 +11406,7 @@
             <a:endParaRPr lang="en-US" sz="1400" dirty="0"/>
           </a:p>
           <a:p>
-            <a:pPr indent="0" marL="0">
+            <a:pPr marL="0" indent="0">
               <a:spcAft>
                 <a:spcPts val="600"/>
               </a:spcAft>
@@ -11389,7 +11423,7 @@
             <a:endParaRPr lang="en-US" sz="1400" dirty="0"/>
           </a:p>
           <a:p>
-            <a:pPr indent="0" marL="0">
+            <a:pPr marL="0" indent="0">
               <a:spcAft>
                 <a:spcPts val="600"/>
               </a:spcAft>
@@ -11406,7 +11440,7 @@
             <a:endParaRPr lang="en-US" sz="1400" dirty="0"/>
           </a:p>
           <a:p>
-            <a:pPr indent="0" marL="0">
+            <a:pPr marL="0" indent="0">
               <a:spcAft>
                 <a:spcPts val="600"/>
               </a:spcAft>
@@ -11423,7 +11457,7 @@
             <a:endParaRPr lang="en-US" sz="1400" dirty="0"/>
           </a:p>
           <a:p>
-            <a:pPr indent="0" marL="0">
+            <a:pPr marL="0" indent="0">
               <a:spcAft>
                 <a:spcPts val="600"/>
               </a:spcAft>
@@ -11440,7 +11474,7 @@
             <a:endParaRPr lang="en-US" sz="1400" dirty="0"/>
           </a:p>
           <a:p>
-            <a:pPr indent="0" marL="0">
+            <a:pPr marL="0" indent="0">
               <a:spcAft>
                 <a:spcPts val="600"/>
               </a:spcAft>
@@ -11523,7 +11557,7 @@
           <a:bodyPr wrap="square" lIns="0" tIns="0" rIns="0" bIns="0" rtlCol="0" anchor="ctr"/>
           <a:lstStyle/>
           <a:p>
-            <a:pPr algn="ctr" indent="0" marL="0">
+            <a:pPr marL="0" indent="0" algn="ctr">
               <a:buNone/>
             </a:pPr>
             <a:r>
@@ -11559,7 +11593,7 @@
           <a:bodyPr wrap="square" lIns="0" tIns="0" rIns="0" bIns="0" rtlCol="0" anchor="t"/>
           <a:lstStyle/>
           <a:p>
-            <a:pPr indent="0" marL="0">
+            <a:pPr marL="0" indent="0">
               <a:spcAft>
                 <a:spcPts val="600"/>
               </a:spcAft>
@@ -11576,7 +11610,7 @@
             <a:endParaRPr lang="en-US" sz="1400" dirty="0"/>
           </a:p>
           <a:p>
-            <a:pPr indent="0" marL="0">
+            <a:pPr marL="0" indent="0">
               <a:spcAft>
                 <a:spcPts val="600"/>
               </a:spcAft>
@@ -11593,7 +11627,7 @@
             <a:endParaRPr lang="en-US" sz="1400" dirty="0"/>
           </a:p>
           <a:p>
-            <a:pPr indent="0" marL="0">
+            <a:pPr marL="0" indent="0">
               <a:spcAft>
                 <a:spcPts val="600"/>
               </a:spcAft>
@@ -11610,7 +11644,7 @@
             <a:endParaRPr lang="en-US" sz="1400" dirty="0"/>
           </a:p>
           <a:p>
-            <a:pPr indent="0" marL="0">
+            <a:pPr marL="0" indent="0">
               <a:spcAft>
                 <a:spcPts val="600"/>
               </a:spcAft>
@@ -11627,7 +11661,7 @@
             <a:endParaRPr lang="en-US" sz="1400" dirty="0"/>
           </a:p>
           <a:p>
-            <a:pPr indent="0" marL="0">
+            <a:pPr marL="0" indent="0">
               <a:spcAft>
                 <a:spcPts val="600"/>
               </a:spcAft>
@@ -11710,7 +11744,7 @@
           <a:bodyPr wrap="square" lIns="0" tIns="0" rIns="0" bIns="0" rtlCol="0" anchor="ctr"/>
           <a:lstStyle/>
           <a:p>
-            <a:pPr algn="ctr" indent="0" marL="0">
+            <a:pPr marL="0" indent="0" algn="ctr">
               <a:buNone/>
             </a:pPr>
             <a:r>
@@ -11746,7 +11780,7 @@
           <a:bodyPr wrap="square" lIns="0" tIns="0" rIns="0" bIns="0" rtlCol="0" anchor="t"/>
           <a:lstStyle/>
           <a:p>
-            <a:pPr indent="0" marL="0">
+            <a:pPr marL="0" indent="0">
               <a:spcAft>
                 <a:spcPts val="600"/>
               </a:spcAft>
@@ -11763,7 +11797,7 @@
             <a:endParaRPr lang="en-US" sz="1400" dirty="0"/>
           </a:p>
           <a:p>
-            <a:pPr indent="0" marL="0">
+            <a:pPr marL="0" indent="0">
               <a:spcAft>
                 <a:spcPts val="600"/>
               </a:spcAft>
@@ -11780,7 +11814,7 @@
             <a:endParaRPr lang="en-US" sz="1400" dirty="0"/>
           </a:p>
           <a:p>
-            <a:pPr indent="0" marL="0">
+            <a:pPr marL="0" indent="0">
               <a:spcAft>
                 <a:spcPts val="600"/>
               </a:spcAft>
@@ -11797,7 +11831,7 @@
             <a:endParaRPr lang="en-US" sz="1400" dirty="0"/>
           </a:p>
           <a:p>
-            <a:pPr indent="0" marL="0">
+            <a:pPr marL="0" indent="0">
               <a:spcAft>
                 <a:spcPts val="600"/>
               </a:spcAft>
@@ -11814,7 +11848,7 @@
             <a:endParaRPr lang="en-US" sz="1400" dirty="0"/>
           </a:p>
           <a:p>
-            <a:pPr indent="0" marL="0">
+            <a:pPr marL="0" indent="0">
               <a:spcAft>
                 <a:spcPts val="600"/>
               </a:spcAft>
@@ -11831,7 +11865,7 @@
             <a:endParaRPr lang="en-US" sz="1400" dirty="0"/>
           </a:p>
           <a:p>
-            <a:pPr indent="0" marL="0">
+            <a:pPr marL="0" indent="0">
               <a:spcAft>
                 <a:spcPts val="600"/>
               </a:spcAft>
@@ -11892,7 +11926,7 @@
           <a:bodyPr wrap="square" lIns="0" tIns="0" rIns="0" bIns="0" rtlCol="0" anchor="ctr"/>
           <a:lstStyle/>
           <a:p>
-            <a:pPr indent="0" marL="0">
+            <a:pPr marL="0" indent="0">
               <a:buNone/>
             </a:pPr>
             <a:r>
@@ -11906,7 +11940,7 @@
             <a:endParaRPr lang="en-US" sz="1600" dirty="0"/>
           </a:p>
           <a:p>
-            <a:pPr indent="0" marL="0">
+            <a:pPr marL="0" indent="0">
               <a:buNone/>
             </a:pPr>
             <a:r>
@@ -11941,7 +11975,7 @@
           </a:prstGeom>
           <a:extLst>
             <a:ext uri="{C572A759-6A51-4108-AA02-DFA0A04FC94B}">
-              <ma14:wrappingTextBoxFlag xmlns:ma14="http://schemas.microsoft.com/office/mac/drawingml/2011/main" val="0"/>
+              <ma14:wrappingTextBoxFlag xmlns:ma14="http://schemas.microsoft.com/office/mac/drawingml/2011/main" xmlns="" val="0"/>
             </a:ext>
           </a:extLst>
         </p:spPr>
@@ -11959,7 +11993,7 @@
           <a:p>
             <a:pPr algn="l"/>
             <a:fld id="{F7021451-1387-4CA6-816F-3879F97B5CBC}" type="slidenum">
-              <a:rPr b="0" lang="en-US"/>
+              <a:rPr lang="en-US" b="0"/>
               <a:t>7</a:t>
             </a:fld>
             <a:endParaRPr lang="en-US"/>
@@ -11994,9 +12028,11 @@
       <p:sp>
         <p:nvSpPr>
           <p:cNvPr id="2" name="Text 0"/>
-          <p:cNvSpPr/>
+          <p:cNvSpPr>
+            <a:spLocks noGrp="1"/>
+          </p:cNvSpPr>
           <p:nvPr>
-            <p:ph idx="100" type="title" hasCustomPrompt="1"/>
+            <p:ph type="title" idx="100" hasCustomPrompt="1"/>
           </p:nvPr>
         </p:nvSpPr>
         <p:spPr>
@@ -12014,7 +12050,7 @@
           <a:bodyPr wrap="square" lIns="0" tIns="0" rIns="0" bIns="0" rtlCol="0" anchor="ctr"/>
           <a:lstStyle/>
           <a:p>
-            <a:pPr algn="l" indent="0" marL="0">
+            <a:pPr marL="0" indent="0" algn="l">
               <a:buNone/>
             </a:pPr>
             <a:r>
@@ -12050,7 +12086,7 @@
           <a:bodyPr wrap="square" lIns="0" tIns="0" rIns="0" bIns="0" rtlCol="0" anchor="t"/>
           <a:lstStyle/>
           <a:p>
-            <a:pPr indent="0" marL="0">
+            <a:pPr marL="0" indent="0">
               <a:buNone/>
             </a:pPr>
             <a:r>
@@ -12086,7 +12122,7 @@
           <a:bodyPr wrap="square" lIns="0" tIns="0" rIns="0" bIns="0" rtlCol="0" anchor="t"/>
           <a:lstStyle/>
           <a:p>
-            <a:pPr indent="0" marL="0">
+            <a:pPr marL="0" indent="0">
               <a:buNone/>
             </a:pPr>
             <a:r>
@@ -12144,7 +12180,7 @@
           <a:bodyPr wrap="square" lIns="0" tIns="0" rIns="0" bIns="0" rtlCol="0" anchor="ctr"/>
           <a:lstStyle/>
           <a:p>
-            <a:pPr algn="ctr" indent="0" marL="0">
+            <a:pPr marL="0" indent="0" algn="ctr">
               <a:buNone/>
             </a:pPr>
             <a:r>
@@ -12202,7 +12238,7 @@
           <a:bodyPr wrap="square" lIns="0" tIns="0" rIns="0" bIns="0" rtlCol="0" anchor="ctr"/>
           <a:lstStyle/>
           <a:p>
-            <a:pPr algn="ctr" indent="0" marL="0">
+            <a:pPr marL="0" indent="0" algn="ctr">
               <a:buNone/>
             </a:pPr>
             <a:r>
@@ -12260,7 +12296,7 @@
           <a:bodyPr wrap="square" lIns="0" tIns="0" rIns="0" bIns="0" rtlCol="0" anchor="ctr"/>
           <a:lstStyle/>
           <a:p>
-            <a:pPr algn="ctr" indent="0" marL="0">
+            <a:pPr marL="0" indent="0" algn="ctr">
               <a:buNone/>
             </a:pPr>
             <a:r>
@@ -12410,7 +12446,7 @@
           <a:bodyPr wrap="square" lIns="0" tIns="0" rIns="0" bIns="0" rtlCol="0" anchor="ctr"/>
           <a:lstStyle/>
           <a:p>
-            <a:pPr algn="ctr" indent="0" marL="0">
+            <a:pPr marL="0" indent="0" algn="ctr">
               <a:buNone/>
             </a:pPr>
             <a:r>
@@ -12424,7 +12460,7 @@
             <a:endParaRPr lang="en-US" sz="1400" dirty="0"/>
           </a:p>
           <a:p>
-            <a:pPr algn="ctr" indent="0" marL="0">
+            <a:pPr marL="0" indent="0" algn="ctr">
               <a:buNone/>
             </a:pPr>
             <a:r>
@@ -12482,7 +12518,7 @@
           <a:bodyPr wrap="square" lIns="0" tIns="0" rIns="0" bIns="0" rtlCol="0" anchor="ctr"/>
           <a:lstStyle/>
           <a:p>
-            <a:pPr algn="ctr" indent="0" marL="0">
+            <a:pPr marL="0" indent="0" algn="ctr">
               <a:buNone/>
             </a:pPr>
             <a:r>
@@ -12540,7 +12576,7 @@
           <a:bodyPr wrap="square" lIns="0" tIns="0" rIns="0" bIns="0" rtlCol="0" anchor="ctr"/>
           <a:lstStyle/>
           <a:p>
-            <a:pPr algn="ctr" indent="0" marL="0">
+            <a:pPr marL="0" indent="0" algn="ctr">
               <a:buNone/>
             </a:pPr>
             <a:r>
@@ -12598,7 +12634,7 @@
           <a:bodyPr wrap="square" lIns="0" tIns="0" rIns="0" bIns="0" rtlCol="0" anchor="ctr"/>
           <a:lstStyle/>
           <a:p>
-            <a:pPr algn="ctr" indent="0" marL="0">
+            <a:pPr marL="0" indent="0" algn="ctr">
               <a:buNone/>
             </a:pPr>
             <a:r>
@@ -12656,7 +12692,7 @@
           <a:bodyPr wrap="square" lIns="0" tIns="0" rIns="0" bIns="0" rtlCol="0" anchor="ctr"/>
           <a:lstStyle/>
           <a:p>
-            <a:pPr algn="ctr" indent="0" marL="0">
+            <a:pPr marL="0" indent="0" algn="ctr">
               <a:buNone/>
             </a:pPr>
             <a:r>
@@ -12852,7 +12888,7 @@
           <a:bodyPr wrap="square" lIns="0" tIns="0" rIns="0" bIns="0" rtlCol="0" anchor="ctr"/>
           <a:lstStyle/>
           <a:p>
-            <a:pPr indent="0" marL="0">
+            <a:pPr marL="0" indent="0">
               <a:buNone/>
             </a:pPr>
             <a:r>
@@ -12866,7 +12902,7 @@
             <a:endParaRPr lang="en-US" sz="1400" dirty="0"/>
           </a:p>
           <a:p>
-            <a:pPr indent="0" marL="0">
+            <a:pPr marL="0" indent="0">
               <a:buNone/>
             </a:pPr>
             <a:r>
@@ -12883,7 +12919,7 @@
       </p:sp>
       <p:sp>
         <p:nvSpPr>
-          <p:cNvPr id="25" name="Slide Number Placeholder 0"/>
+          <p:cNvPr id="3" name="Slide Number Placeholder 0"/>
           <p:cNvSpPr>
             <a:spLocks noGrp="1"/>
           </p:cNvSpPr>
@@ -12901,7 +12937,7 @@
           </a:prstGeom>
           <a:extLst>
             <a:ext uri="{C572A759-6A51-4108-AA02-DFA0A04FC94B}">
-              <ma14:wrappingTextBoxFlag xmlns:ma14="http://schemas.microsoft.com/office/mac/drawingml/2011/main" val="0"/>
+              <ma14:wrappingTextBoxFlag xmlns:ma14="http://schemas.microsoft.com/office/mac/drawingml/2011/main" xmlns="" val="0"/>
             </a:ext>
           </a:extLst>
         </p:spPr>
@@ -12919,7 +12955,7 @@
           <a:p>
             <a:pPr algn="l"/>
             <a:fld id="{F7021451-1387-4CA6-816F-3879F97B5CBC}" type="slidenum">
-              <a:rPr b="0" lang="en-US"/>
+              <a:rPr lang="en-US" b="0"/>
               <a:t>8</a:t>
             </a:fld>
             <a:endParaRPr lang="en-US"/>
@@ -12954,9 +12990,11 @@
       <p:sp>
         <p:nvSpPr>
           <p:cNvPr id="2" name="Text 0"/>
-          <p:cNvSpPr/>
+          <p:cNvSpPr>
+            <a:spLocks noGrp="1"/>
+          </p:cNvSpPr>
           <p:nvPr>
-            <p:ph idx="100" type="title" hasCustomPrompt="1"/>
+            <p:ph type="title" idx="100" hasCustomPrompt="1"/>
           </p:nvPr>
         </p:nvSpPr>
         <p:spPr>
@@ -12974,7 +13012,7 @@
           <a:bodyPr wrap="square" lIns="0" tIns="0" rIns="0" bIns="0" rtlCol="0" anchor="ctr"/>
           <a:lstStyle/>
           <a:p>
-            <a:pPr algn="l" indent="0" marL="0">
+            <a:pPr marL="0" indent="0" algn="l">
               <a:buNone/>
             </a:pPr>
             <a:r>
@@ -13032,7 +13070,7 @@
           <a:bodyPr wrap="square" lIns="0" tIns="0" rIns="0" bIns="0" rtlCol="0" anchor="t"/>
           <a:lstStyle/>
           <a:p>
-            <a:pPr indent="0" marL="0">
+            <a:pPr marL="0" indent="0">
               <a:buNone/>
             </a:pPr>
             <a:r>
@@ -13202,7 +13240,7 @@
           <a:bodyPr wrap="square" lIns="0" tIns="0" rIns="0" bIns="0" rtlCol="0" anchor="t"/>
           <a:lstStyle/>
           <a:p>
-            <a:pPr indent="0" marL="0">
+            <a:pPr marL="0" indent="0">
               <a:buNone/>
             </a:pPr>
             <a:r>
@@ -13372,7 +13410,7 @@
           <a:bodyPr wrap="square" lIns="0" tIns="0" rIns="0" bIns="0" rtlCol="0" anchor="ctr"/>
           <a:lstStyle/>
           <a:p>
-            <a:pPr indent="0" marL="0">
+            <a:pPr marL="0" indent="0">
               <a:buNone/>
             </a:pPr>
             <a:r>
@@ -13389,7 +13427,7 @@
             <a:endParaRPr lang="en-US" sz="1300" dirty="0"/>
           </a:p>
           <a:p>
-            <a:pPr indent="0" marL="0">
+            <a:pPr marL="0" indent="0">
               <a:buNone/>
             </a:pPr>
             <a:r>
@@ -13406,7 +13444,7 @@
             <a:endParaRPr lang="en-US" sz="1300" dirty="0"/>
           </a:p>
           <a:p>
-            <a:pPr indent="0" marL="0">
+            <a:pPr marL="0" indent="0">
               <a:buNone/>
             </a:pPr>
             <a:r>
@@ -13423,7 +13461,7 @@
             <a:endParaRPr lang="en-US" sz="1300" dirty="0"/>
           </a:p>
           <a:p>
-            <a:pPr indent="0" marL="0">
+            <a:pPr marL="0" indent="0">
               <a:buNone/>
             </a:pPr>
             <a:r>
@@ -13461,7 +13499,7 @@
           </a:prstGeom>
           <a:extLst>
             <a:ext uri="{C572A759-6A51-4108-AA02-DFA0A04FC94B}">
-              <ma14:wrappingTextBoxFlag xmlns:ma14="http://schemas.microsoft.com/office/mac/drawingml/2011/main" val="0"/>
+              <ma14:wrappingTextBoxFlag xmlns:ma14="http://schemas.microsoft.com/office/mac/drawingml/2011/main" xmlns="" val="0"/>
             </a:ext>
           </a:extLst>
         </p:spPr>
@@ -13479,7 +13517,7 @@
           <a:p>
             <a:pPr algn="l"/>
             <a:fld id="{F7021451-1387-4CA6-816F-3879F97B5CBC}" type="slidenum">
-              <a:rPr b="0" lang="en-US"/>
+              <a:rPr lang="en-US" b="0"/>
               <a:t>9</a:t>
             </a:fld>
             <a:endParaRPr lang="en-US"/>
@@ -13787,4 +13825,265 @@
     </a:ext>
   </a:extLst>
 </a:theme>
+</file>
+
+<file path=ppt/theme/theme2.xml><?xml version="1.0" encoding="utf-8"?>
+<a:theme xmlns:a="http://schemas.openxmlformats.org/drawingml/2006/main" name="Office Theme">
+  <a:themeElements>
+    <a:clrScheme name="Office">
+      <a:dk1>
+        <a:sysClr val="windowText" lastClr="000000"/>
+      </a:dk1>
+      <a:lt1>
+        <a:sysClr val="window" lastClr="FFFFFF"/>
+      </a:lt1>
+      <a:dk2>
+        <a:srgbClr val="44546A"/>
+      </a:dk2>
+      <a:lt2>
+        <a:srgbClr val="E7E6E6"/>
+      </a:lt2>
+      <a:accent1>
+        <a:srgbClr val="5B9BD5"/>
+      </a:accent1>
+      <a:accent2>
+        <a:srgbClr val="ED7D31"/>
+      </a:accent2>
+      <a:accent3>
+        <a:srgbClr val="A5A5A5"/>
+      </a:accent3>
+      <a:accent4>
+        <a:srgbClr val="FFC000"/>
+      </a:accent4>
+      <a:accent5>
+        <a:srgbClr val="4472C4"/>
+      </a:accent5>
+      <a:accent6>
+        <a:srgbClr val="70AD47"/>
+      </a:accent6>
+      <a:hlink>
+        <a:srgbClr val="0563C1"/>
+      </a:hlink>
+      <a:folHlink>
+        <a:srgbClr val="954F72"/>
+      </a:folHlink>
+    </a:clrScheme>
+    <a:fontScheme name="Office">
+      <a:majorFont>
+        <a:latin typeface="Calibri Light" panose="020F0302020204030204"/>
+        <a:ea typeface=""/>
+        <a:cs typeface=""/>
+        <a:font script="Jpan" typeface="游ゴシック Light"/>
+        <a:font script="Hang" typeface="맑은 고딕"/>
+        <a:font script="Hans" typeface="等线 Light"/>
+        <a:font script="Hant" typeface="新細明體"/>
+        <a:font script="Arab" typeface="Times New Roman"/>
+        <a:font script="Hebr" typeface="Times New Roman"/>
+        <a:font script="Thai" typeface="Angsana New"/>
+        <a:font script="Ethi" typeface="Nyala"/>
+        <a:font script="Beng" typeface="Vrinda"/>
+        <a:font script="Gujr" typeface="Shruti"/>
+        <a:font script="Khmr" typeface="MoolBoran"/>
+        <a:font script="Knda" typeface="Tunga"/>
+        <a:font script="Guru" typeface="Raavi"/>
+        <a:font script="Cans" typeface="Euphemia"/>
+        <a:font script="Cher" typeface="Plantagenet Cherokee"/>
+        <a:font script="Yiii" typeface="Microsoft Yi Baiti"/>
+        <a:font script="Tibt" typeface="Microsoft Himalaya"/>
+        <a:font script="Thaa" typeface="MV Boli"/>
+        <a:font script="Deva" typeface="Mangal"/>
+        <a:font script="Telu" typeface="Gautami"/>
+        <a:font script="Taml" typeface="Latha"/>
+        <a:font script="Syrc" typeface="Estrangelo Edessa"/>
+        <a:font script="Orya" typeface="Kalinga"/>
+        <a:font script="Mlym" typeface="Kartika"/>
+        <a:font script="Laoo" typeface="DokChampa"/>
+        <a:font script="Sinh" typeface="Iskoola Pota"/>
+        <a:font script="Mong" typeface="Mongolian Baiti"/>
+        <a:font script="Viet" typeface="Times New Roman"/>
+        <a:font script="Uigh" typeface="Microsoft Uighur"/>
+        <a:font script="Geor" typeface="Sylfaen"/>
+      </a:majorFont>
+      <a:minorFont>
+        <a:latin typeface="Calibri" panose="020F0502020204030204"/>
+        <a:ea typeface=""/>
+        <a:cs typeface=""/>
+        <a:font script="Jpan" typeface="游ゴシック"/>
+        <a:font script="Hang" typeface="맑은 고딕"/>
+        <a:font script="Hans" typeface="等线"/>
+        <a:font script="Hant" typeface="新細明體"/>
+        <a:font script="Arab" typeface="Arial"/>
+        <a:font script="Hebr" typeface="Arial"/>
+        <a:font script="Thai" typeface="Cordia New"/>
+        <a:font script="Ethi" typeface="Nyala"/>
+        <a:font script="Beng" typeface="Vrinda"/>
+        <a:font script="Gujr" typeface="Shruti"/>
+        <a:font script="Khmr" typeface="DaunPenh"/>
+        <a:font script="Knda" typeface="Tunga"/>
+        <a:font script="Guru" typeface="Raavi"/>
+        <a:font script="Cans" typeface="Euphemia"/>
+        <a:font script="Cher" typeface="Plantagenet Cherokee"/>
+        <a:font script="Yiii" typeface="Microsoft Yi Baiti"/>
+        <a:font script="Tibt" typeface="Microsoft Himalaya"/>
+        <a:font script="Thaa" typeface="MV Boli"/>
+        <a:font script="Deva" typeface="Mangal"/>
+        <a:font script="Telu" typeface="Gautami"/>
+        <a:font script="Taml" typeface="Latha"/>
+        <a:font script="Syrc" typeface="Estrangelo Edessa"/>
+        <a:font script="Orya" typeface="Kalinga"/>
+        <a:font script="Mlym" typeface="Kartika"/>
+        <a:font script="Laoo" typeface="DokChampa"/>
+        <a:font script="Sinh" typeface="Iskoola Pota"/>
+        <a:font script="Mong" typeface="Mongolian Baiti"/>
+        <a:font script="Viet" typeface="Arial"/>
+        <a:font script="Uigh" typeface="Microsoft Uighur"/>
+        <a:font script="Geor" typeface="Sylfaen"/>
+      </a:minorFont>
+    </a:fontScheme>
+    <a:fmtScheme name="Office">
+      <a:fillStyleLst>
+        <a:solidFill>
+          <a:schemeClr val="phClr"/>
+        </a:solidFill>
+        <a:gradFill rotWithShape="1">
+          <a:gsLst>
+            <a:gs pos="0">
+              <a:schemeClr val="phClr">
+                <a:lumMod val="110000"/>
+                <a:satMod val="105000"/>
+                <a:tint val="67000"/>
+              </a:schemeClr>
+            </a:gs>
+            <a:gs pos="50000">
+              <a:schemeClr val="phClr">
+                <a:lumMod val="105000"/>
+                <a:satMod val="103000"/>
+                <a:tint val="73000"/>
+              </a:schemeClr>
+            </a:gs>
+            <a:gs pos="100000">
+              <a:schemeClr val="phClr">
+                <a:lumMod val="105000"/>
+                <a:satMod val="109000"/>
+                <a:tint val="81000"/>
+              </a:schemeClr>
+            </a:gs>
+          </a:gsLst>
+          <a:lin ang="5400000" scaled="0"/>
+        </a:gradFill>
+        <a:gradFill rotWithShape="1">
+          <a:gsLst>
+            <a:gs pos="0">
+              <a:schemeClr val="phClr">
+                <a:satMod val="103000"/>
+                <a:lumMod val="102000"/>
+                <a:tint val="94000"/>
+              </a:schemeClr>
+            </a:gs>
+            <a:gs pos="50000">
+              <a:schemeClr val="phClr">
+                <a:satMod val="110000"/>
+                <a:lumMod val="100000"/>
+                <a:shade val="100000"/>
+              </a:schemeClr>
+            </a:gs>
+            <a:gs pos="100000">
+              <a:schemeClr val="phClr">
+                <a:lumMod val="99000"/>
+                <a:satMod val="120000"/>
+                <a:shade val="78000"/>
+              </a:schemeClr>
+            </a:gs>
+          </a:gsLst>
+          <a:lin ang="5400000" scaled="0"/>
+        </a:gradFill>
+      </a:fillStyleLst>
+      <a:lnStyleLst>
+        <a:ln w="6350" cap="flat" cmpd="sng" algn="ctr">
+          <a:solidFill>
+            <a:schemeClr val="phClr"/>
+          </a:solidFill>
+          <a:prstDash val="solid"/>
+          <a:miter lim="800000"/>
+        </a:ln>
+        <a:ln w="12700" cap="flat" cmpd="sng" algn="ctr">
+          <a:solidFill>
+            <a:schemeClr val="phClr"/>
+          </a:solidFill>
+          <a:prstDash val="solid"/>
+          <a:miter lim="800000"/>
+        </a:ln>
+        <a:ln w="19050" cap="flat" cmpd="sng" algn="ctr">
+          <a:solidFill>
+            <a:schemeClr val="phClr"/>
+          </a:solidFill>
+          <a:prstDash val="solid"/>
+          <a:miter lim="800000"/>
+        </a:ln>
+      </a:lnStyleLst>
+      <a:effectStyleLst>
+        <a:effectStyle>
+          <a:effectLst/>
+        </a:effectStyle>
+        <a:effectStyle>
+          <a:effectLst/>
+        </a:effectStyle>
+        <a:effectStyle>
+          <a:effectLst>
+            <a:outerShdw blurRad="57150" dist="19050" dir="5400000" algn="ctr" rotWithShape="0">
+              <a:srgbClr val="000000">
+                <a:alpha val="63000"/>
+              </a:srgbClr>
+            </a:outerShdw>
+          </a:effectLst>
+        </a:effectStyle>
+      </a:effectStyleLst>
+      <a:bgFillStyleLst>
+        <a:solidFill>
+          <a:schemeClr val="phClr"/>
+        </a:solidFill>
+        <a:solidFill>
+          <a:schemeClr val="phClr">
+            <a:tint val="95000"/>
+            <a:satMod val="170000"/>
+          </a:schemeClr>
+        </a:solidFill>
+        <a:gradFill rotWithShape="1">
+          <a:gsLst>
+            <a:gs pos="0">
+              <a:schemeClr val="phClr">
+                <a:tint val="93000"/>
+                <a:satMod val="150000"/>
+                <a:shade val="98000"/>
+                <a:lumMod val="102000"/>
+              </a:schemeClr>
+            </a:gs>
+            <a:gs pos="50000">
+              <a:schemeClr val="phClr">
+                <a:tint val="98000"/>
+                <a:satMod val="130000"/>
+                <a:shade val="90000"/>
+                <a:lumMod val="103000"/>
+              </a:schemeClr>
+            </a:gs>
+            <a:gs pos="100000">
+              <a:schemeClr val="phClr">
+                <a:shade val="63000"/>
+                <a:satMod val="120000"/>
+              </a:schemeClr>
+            </a:gs>
+          </a:gsLst>
+          <a:lin ang="5400000" scaled="0"/>
+        </a:gradFill>
+      </a:bgFillStyleLst>
+    </a:fmtScheme>
+  </a:themeElements>
+  <a:objectDefaults/>
+  <a:extraClrSchemeLst/>
+  <a:extLst>
+    <a:ext uri="{05A4C25C-085E-4340-85A3-A5531E510DB2}">
+      <thm15:themeFamily xmlns:thm15="http://schemas.microsoft.com/office/thememl/2012/main" name="Office Theme" id="{62F939B6-93AF-4DB8-9C6B-D6C7DFDC589F}" vid="{4A3C46E8-61CC-4603-A589-7422A47A8E4A}"/>
+    </a:ext>
+  </a:extLst>
+</a:theme>
 </file>